--- a/ゲーム科2年/00_前期/ゲーム開発Ⅰ/19_シューティングゲーム課題.pptx
+++ b/ゲーム科2年/00_前期/ゲーム開発Ⅰ/19_シューティングゲーム課題.pptx
@@ -10,15 +10,6 @@
     <p:sldId id="261" r:id="rId4"/>
     <p:sldId id="262" r:id="rId5"/>
     <p:sldId id="263" r:id="rId6"/>
-    <p:sldId id="264" r:id="rId7"/>
-    <p:sldId id="265" r:id="rId8"/>
-    <p:sldId id="266" r:id="rId9"/>
-    <p:sldId id="267" r:id="rId10"/>
-    <p:sldId id="268" r:id="rId11"/>
-    <p:sldId id="269" r:id="rId12"/>
-    <p:sldId id="270" r:id="rId13"/>
-    <p:sldId id="271" r:id="rId14"/>
-    <p:sldId id="272" r:id="rId15"/>
   </p:sldIdLst>
   <p:sldSz cx="12192000" cy="6858000"/>
   <p:notesSz cx="6858000" cy="9144000"/>
@@ -284,7 +275,7 @@
           <a:p>
             <a:fld id="{E9CC885B-4903-4D54-9A93-00025F12DED9}" type="datetimeFigureOut">
               <a:rPr kumimoji="1" lang="ja-JP" altLang="en-US" smtClean="0"/>
-              <a:t>2024/11/27</a:t>
+              <a:t>2025/4/21</a:t>
             </a:fld>
             <a:endParaRPr kumimoji="1" lang="ja-JP" altLang="en-US"/>
           </a:p>
@@ -514,7 +505,7 @@
           <a:p>
             <a:fld id="{E9CC885B-4903-4D54-9A93-00025F12DED9}" type="datetimeFigureOut">
               <a:rPr kumimoji="1" lang="ja-JP" altLang="en-US" smtClean="0"/>
-              <a:t>2024/11/27</a:t>
+              <a:t>2025/4/21</a:t>
             </a:fld>
             <a:endParaRPr kumimoji="1" lang="ja-JP" altLang="en-US"/>
           </a:p>
@@ -754,7 +745,7 @@
           <a:p>
             <a:fld id="{E9CC885B-4903-4D54-9A93-00025F12DED9}" type="datetimeFigureOut">
               <a:rPr kumimoji="1" lang="ja-JP" altLang="en-US" smtClean="0"/>
-              <a:t>2024/11/27</a:t>
+              <a:t>2025/4/21</a:t>
             </a:fld>
             <a:endParaRPr kumimoji="1" lang="ja-JP" altLang="en-US"/>
           </a:p>
@@ -984,7 +975,7 @@
           <a:p>
             <a:fld id="{E9CC885B-4903-4D54-9A93-00025F12DED9}" type="datetimeFigureOut">
               <a:rPr kumimoji="1" lang="ja-JP" altLang="en-US" smtClean="0"/>
-              <a:t>2024/11/27</a:t>
+              <a:t>2025/4/21</a:t>
             </a:fld>
             <a:endParaRPr kumimoji="1" lang="ja-JP" altLang="en-US"/>
           </a:p>
@@ -1259,7 +1250,7 @@
           <a:p>
             <a:fld id="{E9CC885B-4903-4D54-9A93-00025F12DED9}" type="datetimeFigureOut">
               <a:rPr kumimoji="1" lang="ja-JP" altLang="en-US" smtClean="0"/>
-              <a:t>2024/11/27</a:t>
+              <a:t>2025/4/21</a:t>
             </a:fld>
             <a:endParaRPr kumimoji="1" lang="ja-JP" altLang="en-US"/>
           </a:p>
@@ -1588,7 +1579,7 @@
           <a:p>
             <a:fld id="{E9CC885B-4903-4D54-9A93-00025F12DED9}" type="datetimeFigureOut">
               <a:rPr kumimoji="1" lang="ja-JP" altLang="en-US" smtClean="0"/>
-              <a:t>2024/11/27</a:t>
+              <a:t>2025/4/21</a:t>
             </a:fld>
             <a:endParaRPr kumimoji="1" lang="ja-JP" altLang="en-US"/>
           </a:p>
@@ -2064,7 +2055,7 @@
           <a:p>
             <a:fld id="{E9CC885B-4903-4D54-9A93-00025F12DED9}" type="datetimeFigureOut">
               <a:rPr kumimoji="1" lang="ja-JP" altLang="en-US" smtClean="0"/>
-              <a:t>2024/11/27</a:t>
+              <a:t>2025/4/21</a:t>
             </a:fld>
             <a:endParaRPr kumimoji="1" lang="ja-JP" altLang="en-US"/>
           </a:p>
@@ -2205,7 +2196,7 @@
           <a:p>
             <a:fld id="{E9CC885B-4903-4D54-9A93-00025F12DED9}" type="datetimeFigureOut">
               <a:rPr kumimoji="1" lang="ja-JP" altLang="en-US" smtClean="0"/>
-              <a:t>2024/11/27</a:t>
+              <a:t>2025/4/21</a:t>
             </a:fld>
             <a:endParaRPr kumimoji="1" lang="ja-JP" altLang="en-US"/>
           </a:p>
@@ -2318,7 +2309,7 @@
           <a:p>
             <a:fld id="{E9CC885B-4903-4D54-9A93-00025F12DED9}" type="datetimeFigureOut">
               <a:rPr kumimoji="1" lang="ja-JP" altLang="en-US" smtClean="0"/>
-              <a:t>2024/11/27</a:t>
+              <a:t>2025/4/21</a:t>
             </a:fld>
             <a:endParaRPr kumimoji="1" lang="ja-JP" altLang="en-US"/>
           </a:p>
@@ -2661,7 +2652,7 @@
           <a:p>
             <a:fld id="{E9CC885B-4903-4D54-9A93-00025F12DED9}" type="datetimeFigureOut">
               <a:rPr kumimoji="1" lang="ja-JP" altLang="en-US" smtClean="0"/>
-              <a:t>2024/11/27</a:t>
+              <a:t>2025/4/21</a:t>
             </a:fld>
             <a:endParaRPr kumimoji="1" lang="ja-JP" altLang="en-US"/>
           </a:p>
@@ -2949,7 +2940,7 @@
           <a:p>
             <a:fld id="{E9CC885B-4903-4D54-9A93-00025F12DED9}" type="datetimeFigureOut">
               <a:rPr kumimoji="1" lang="ja-JP" altLang="en-US" smtClean="0"/>
-              <a:t>2024/11/27</a:t>
+              <a:t>2025/4/21</a:t>
             </a:fld>
             <a:endParaRPr kumimoji="1" lang="ja-JP" altLang="en-US"/>
           </a:p>
@@ -3222,7 +3213,7 @@
           <a:p>
             <a:fld id="{E9CC885B-4903-4D54-9A93-00025F12DED9}" type="datetimeFigureOut">
               <a:rPr kumimoji="1" lang="ja-JP" altLang="en-US" smtClean="0"/>
-              <a:t>2024/11/27</a:t>
+              <a:t>2025/4/21</a:t>
             </a:fld>
             <a:endParaRPr kumimoji="1" lang="ja-JP" altLang="en-US"/>
           </a:p>
@@ -3654,7 +3645,7 @@
         <p:spPr>
           <a:xfrm>
             <a:off x="567542" y="491954"/>
-            <a:ext cx="3057247" cy="584775"/>
+            <a:ext cx="5109091" cy="584775"/>
           </a:xfrm>
           <a:prstGeom prst="rect">
             <a:avLst/>
@@ -3669,7 +3660,7 @@
           <a:p>
             <a:r>
               <a:rPr lang="ja-JP" altLang="en-US" sz="3200" b="1" u="sng" dirty="0"/>
-              <a:t>シャドウマップ</a:t>
+              <a:t>シューティングゲーム課題</a:t>
             </a:r>
             <a:endParaRPr kumimoji="1" lang="en-US" altLang="ja-JP" sz="3200" b="1" u="sng" dirty="0"/>
           </a:p>
@@ -3690,7 +3681,7 @@
         <p:spPr>
           <a:xfrm>
             <a:off x="567542" y="1216429"/>
-            <a:ext cx="6032421" cy="461665"/>
+            <a:ext cx="10570522" cy="461665"/>
           </a:xfrm>
           <a:prstGeom prst="rect">
             <a:avLst/>
@@ -3705,838 +3696,24 @@
           <a:p>
             <a:r>
               <a:rPr lang="ja-JP" altLang="en-US" sz="2400" dirty="0"/>
-              <a:t>キャラクターの影を地面に表示させます。</a:t>
+              <a:t>これまで学習したことを使って３</a:t>
+            </a:r>
+            <a:r>
+              <a:rPr lang="en-US" altLang="ja-JP" sz="2400" dirty="0"/>
+              <a:t>D</a:t>
+            </a:r>
+            <a:r>
+              <a:rPr lang="ja-JP" altLang="en-US" sz="2400" dirty="0"/>
+              <a:t>シューティングゲームを作りましょう。</a:t>
             </a:r>
             <a:endParaRPr lang="en-US" altLang="ja-JP" sz="2400" dirty="0"/>
           </a:p>
         </p:txBody>
       </p:sp>
-      <p:pic>
-        <p:nvPicPr>
-          <p:cNvPr id="3" name="図 2">
-            <a:extLst>
-              <a:ext uri="{FF2B5EF4-FFF2-40B4-BE49-F238E27FC236}">
-                <a16:creationId xmlns:a16="http://schemas.microsoft.com/office/drawing/2014/main" id="{BEFB53B1-1A57-4CC0-A4F7-B088FB360F26}"/>
-              </a:ext>
-            </a:extLst>
-          </p:cNvPr>
-          <p:cNvPicPr>
-            <a:picLocks noChangeAspect="1"/>
-          </p:cNvPicPr>
-          <p:nvPr/>
-        </p:nvPicPr>
-        <p:blipFill>
-          <a:blip r:embed="rId2"/>
-          <a:stretch>
-            <a:fillRect/>
-          </a:stretch>
-        </p:blipFill>
-        <p:spPr>
-          <a:xfrm>
-            <a:off x="567542" y="1817794"/>
-            <a:ext cx="6330692" cy="4379806"/>
-          </a:xfrm>
-          <a:prstGeom prst="rect">
-            <a:avLst/>
-          </a:prstGeom>
-        </p:spPr>
-      </p:pic>
     </p:spTree>
     <p:extLst>
       <p:ext uri="{BB962C8B-B14F-4D97-AF65-F5344CB8AC3E}">
         <p14:creationId xmlns:p14="http://schemas.microsoft.com/office/powerpoint/2010/main" val="1518223547"/>
-      </p:ext>
-    </p:extLst>
-  </p:cSld>
-  <p:clrMapOvr>
-    <a:masterClrMapping/>
-  </p:clrMapOvr>
-</p:sld>
-</file>
-
-<file path=ppt/slides/slide10.xml><?xml version="1.0" encoding="utf-8"?>
-<p:sld xmlns:a="http://schemas.openxmlformats.org/drawingml/2006/main" xmlns:r="http://schemas.openxmlformats.org/officeDocument/2006/relationships" xmlns:p="http://schemas.openxmlformats.org/presentationml/2006/main">
-  <p:cSld>
-    <p:spTree>
-      <p:nvGrpSpPr>
-        <p:cNvPr id="1" name=""/>
-        <p:cNvGrpSpPr/>
-        <p:nvPr/>
-      </p:nvGrpSpPr>
-      <p:grpSpPr>
-        <a:xfrm>
-          <a:off x="0" y="0"/>
-          <a:ext cx="0" cy="0"/>
-          <a:chOff x="0" y="0"/>
-          <a:chExt cx="0" cy="0"/>
-        </a:xfrm>
-      </p:grpSpPr>
-      <p:sp>
-        <p:nvSpPr>
-          <p:cNvPr id="4" name="テキスト ボックス 3">
-            <a:extLst>
-              <a:ext uri="{FF2B5EF4-FFF2-40B4-BE49-F238E27FC236}">
-                <a16:creationId xmlns:a16="http://schemas.microsoft.com/office/drawing/2014/main" id="{5A13BF46-B8C5-48AA-8308-C9ECFF431A18}"/>
-              </a:ext>
-            </a:extLst>
-          </p:cNvPr>
-          <p:cNvSpPr txBox="1"/>
-          <p:nvPr/>
-        </p:nvSpPr>
-        <p:spPr>
-          <a:xfrm>
-            <a:off x="567542" y="491954"/>
-            <a:ext cx="3057247" cy="584775"/>
-          </a:xfrm>
-          <a:prstGeom prst="rect">
-            <a:avLst/>
-          </a:prstGeom>
-          <a:noFill/>
-        </p:spPr>
-        <p:txBody>
-          <a:bodyPr wrap="none" rtlCol="0">
-            <a:spAutoFit/>
-          </a:bodyPr>
-          <a:lstStyle/>
-          <a:p>
-            <a:r>
-              <a:rPr lang="ja-JP" altLang="en-US" sz="3200" b="1" u="sng" dirty="0"/>
-              <a:t>シャドウマップ</a:t>
-            </a:r>
-            <a:endParaRPr kumimoji="1" lang="en-US" altLang="ja-JP" sz="3200" b="1" u="sng" dirty="0"/>
-          </a:p>
-        </p:txBody>
-      </p:sp>
-      <p:sp>
-        <p:nvSpPr>
-          <p:cNvPr id="6" name="テキスト ボックス 5">
-            <a:extLst>
-              <a:ext uri="{FF2B5EF4-FFF2-40B4-BE49-F238E27FC236}">
-                <a16:creationId xmlns:a16="http://schemas.microsoft.com/office/drawing/2014/main" id="{55830AD6-028B-4C4E-80BF-B70DFC1C3A46}"/>
-              </a:ext>
-            </a:extLst>
-          </p:cNvPr>
-          <p:cNvSpPr txBox="1"/>
-          <p:nvPr/>
-        </p:nvSpPr>
-        <p:spPr>
-          <a:xfrm>
-            <a:off x="567542" y="1216429"/>
-            <a:ext cx="6340197" cy="461665"/>
-          </a:xfrm>
-          <a:prstGeom prst="rect">
-            <a:avLst/>
-          </a:prstGeom>
-          <a:noFill/>
-        </p:spPr>
-        <p:txBody>
-          <a:bodyPr wrap="none" rtlCol="0">
-            <a:spAutoFit/>
-          </a:bodyPr>
-          <a:lstStyle/>
-          <a:p>
-            <a:r>
-              <a:rPr lang="ja-JP" altLang="en-US" sz="2400" dirty="0"/>
-              <a:t>つづいて影描画モードを終了する処理です。</a:t>
-            </a:r>
-            <a:endParaRPr lang="en-US" altLang="ja-JP" sz="2400" dirty="0"/>
-          </a:p>
-        </p:txBody>
-      </p:sp>
-      <p:pic>
-        <p:nvPicPr>
-          <p:cNvPr id="5" name="図 4">
-            <a:extLst>
-              <a:ext uri="{FF2B5EF4-FFF2-40B4-BE49-F238E27FC236}">
-                <a16:creationId xmlns:a16="http://schemas.microsoft.com/office/drawing/2014/main" id="{AB1B53BA-A601-4D04-B752-2C9F8059AF00}"/>
-              </a:ext>
-            </a:extLst>
-          </p:cNvPr>
-          <p:cNvPicPr>
-            <a:picLocks noChangeAspect="1"/>
-          </p:cNvPicPr>
-          <p:nvPr/>
-        </p:nvPicPr>
-        <p:blipFill>
-          <a:blip r:embed="rId2"/>
-          <a:stretch>
-            <a:fillRect/>
-          </a:stretch>
-        </p:blipFill>
-        <p:spPr>
-          <a:xfrm>
-            <a:off x="567541" y="1817793"/>
-            <a:ext cx="6929441" cy="1678939"/>
-          </a:xfrm>
-          <a:prstGeom prst="rect">
-            <a:avLst/>
-          </a:prstGeom>
-        </p:spPr>
-      </p:pic>
-    </p:spTree>
-    <p:extLst>
-      <p:ext uri="{BB962C8B-B14F-4D97-AF65-F5344CB8AC3E}">
-        <p14:creationId xmlns:p14="http://schemas.microsoft.com/office/powerpoint/2010/main" val="3278992939"/>
-      </p:ext>
-    </p:extLst>
-  </p:cSld>
-  <p:clrMapOvr>
-    <a:masterClrMapping/>
-  </p:clrMapOvr>
-</p:sld>
-</file>
-
-<file path=ppt/slides/slide11.xml><?xml version="1.0" encoding="utf-8"?>
-<p:sld xmlns:a="http://schemas.openxmlformats.org/drawingml/2006/main" xmlns:r="http://schemas.openxmlformats.org/officeDocument/2006/relationships" xmlns:p="http://schemas.openxmlformats.org/presentationml/2006/main">
-  <p:cSld>
-    <p:spTree>
-      <p:nvGrpSpPr>
-        <p:cNvPr id="1" name=""/>
-        <p:cNvGrpSpPr/>
-        <p:nvPr/>
-      </p:nvGrpSpPr>
-      <p:grpSpPr>
-        <a:xfrm>
-          <a:off x="0" y="0"/>
-          <a:ext cx="0" cy="0"/>
-          <a:chOff x="0" y="0"/>
-          <a:chExt cx="0" cy="0"/>
-        </a:xfrm>
-      </p:grpSpPr>
-      <p:sp>
-        <p:nvSpPr>
-          <p:cNvPr id="4" name="テキスト ボックス 3">
-            <a:extLst>
-              <a:ext uri="{FF2B5EF4-FFF2-40B4-BE49-F238E27FC236}">
-                <a16:creationId xmlns:a16="http://schemas.microsoft.com/office/drawing/2014/main" id="{5A13BF46-B8C5-48AA-8308-C9ECFF431A18}"/>
-              </a:ext>
-            </a:extLst>
-          </p:cNvPr>
-          <p:cNvSpPr txBox="1"/>
-          <p:nvPr/>
-        </p:nvSpPr>
-        <p:spPr>
-          <a:xfrm>
-            <a:off x="567542" y="491954"/>
-            <a:ext cx="3057247" cy="584775"/>
-          </a:xfrm>
-          <a:prstGeom prst="rect">
-            <a:avLst/>
-          </a:prstGeom>
-          <a:noFill/>
-        </p:spPr>
-        <p:txBody>
-          <a:bodyPr wrap="none" rtlCol="0">
-            <a:spAutoFit/>
-          </a:bodyPr>
-          <a:lstStyle/>
-          <a:p>
-            <a:r>
-              <a:rPr lang="ja-JP" altLang="en-US" sz="3200" b="1" u="sng" dirty="0"/>
-              <a:t>シャドウマップ</a:t>
-            </a:r>
-            <a:endParaRPr kumimoji="1" lang="en-US" altLang="ja-JP" sz="3200" b="1" u="sng" dirty="0"/>
-          </a:p>
-        </p:txBody>
-      </p:sp>
-      <p:sp>
-        <p:nvSpPr>
-          <p:cNvPr id="6" name="テキスト ボックス 5">
-            <a:extLst>
-              <a:ext uri="{FF2B5EF4-FFF2-40B4-BE49-F238E27FC236}">
-                <a16:creationId xmlns:a16="http://schemas.microsoft.com/office/drawing/2014/main" id="{55830AD6-028B-4C4E-80BF-B70DFC1C3A46}"/>
-              </a:ext>
-            </a:extLst>
-          </p:cNvPr>
-          <p:cNvSpPr txBox="1"/>
-          <p:nvPr/>
-        </p:nvSpPr>
-        <p:spPr>
-          <a:xfrm>
-            <a:off x="567542" y="1216429"/>
-            <a:ext cx="7571303" cy="461665"/>
-          </a:xfrm>
-          <a:prstGeom prst="rect">
-            <a:avLst/>
-          </a:prstGeom>
-          <a:noFill/>
-        </p:spPr>
-        <p:txBody>
-          <a:bodyPr wrap="none" rtlCol="0">
-            <a:spAutoFit/>
-          </a:bodyPr>
-          <a:lstStyle/>
-          <a:p>
-            <a:r>
-              <a:rPr lang="ja-JP" altLang="en-US" sz="2400" dirty="0"/>
-              <a:t>つづいて</a:t>
-            </a:r>
-            <a:r>
-              <a:rPr lang="ja-JP" altLang="en-US" sz="2400" b="1" dirty="0">
-                <a:solidFill>
-                  <a:srgbClr val="FF0000"/>
-                </a:solidFill>
-              </a:rPr>
-              <a:t>影が映る描画モード</a:t>
-            </a:r>
-            <a:r>
-              <a:rPr lang="ja-JP" altLang="en-US" sz="2400" dirty="0"/>
-              <a:t>に切り替える処理です。</a:t>
-            </a:r>
-            <a:endParaRPr lang="en-US" altLang="ja-JP" sz="2400" dirty="0"/>
-          </a:p>
-        </p:txBody>
-      </p:sp>
-      <p:pic>
-        <p:nvPicPr>
-          <p:cNvPr id="3" name="図 2">
-            <a:extLst>
-              <a:ext uri="{FF2B5EF4-FFF2-40B4-BE49-F238E27FC236}">
-                <a16:creationId xmlns:a16="http://schemas.microsoft.com/office/drawing/2014/main" id="{FE40008A-9F97-4948-9410-6477FB68EFAF}"/>
-              </a:ext>
-            </a:extLst>
-          </p:cNvPr>
-          <p:cNvPicPr>
-            <a:picLocks noChangeAspect="1"/>
-          </p:cNvPicPr>
-          <p:nvPr/>
-        </p:nvPicPr>
-        <p:blipFill>
-          <a:blip r:embed="rId2"/>
-          <a:stretch>
-            <a:fillRect/>
-          </a:stretch>
-        </p:blipFill>
-        <p:spPr>
-          <a:xfrm>
-            <a:off x="567541" y="1817794"/>
-            <a:ext cx="7870927" cy="2618739"/>
-          </a:xfrm>
-          <a:prstGeom prst="rect">
-            <a:avLst/>
-          </a:prstGeom>
-        </p:spPr>
-      </p:pic>
-    </p:spTree>
-    <p:extLst>
-      <p:ext uri="{BB962C8B-B14F-4D97-AF65-F5344CB8AC3E}">
-        <p14:creationId xmlns:p14="http://schemas.microsoft.com/office/powerpoint/2010/main" val="3228848608"/>
-      </p:ext>
-    </p:extLst>
-  </p:cSld>
-  <p:clrMapOvr>
-    <a:masterClrMapping/>
-  </p:clrMapOvr>
-</p:sld>
-</file>
-
-<file path=ppt/slides/slide12.xml><?xml version="1.0" encoding="utf-8"?>
-<p:sld xmlns:a="http://schemas.openxmlformats.org/drawingml/2006/main" xmlns:r="http://schemas.openxmlformats.org/officeDocument/2006/relationships" xmlns:p="http://schemas.openxmlformats.org/presentationml/2006/main">
-  <p:cSld>
-    <p:spTree>
-      <p:nvGrpSpPr>
-        <p:cNvPr id="1" name=""/>
-        <p:cNvGrpSpPr/>
-        <p:nvPr/>
-      </p:nvGrpSpPr>
-      <p:grpSpPr>
-        <a:xfrm>
-          <a:off x="0" y="0"/>
-          <a:ext cx="0" cy="0"/>
-          <a:chOff x="0" y="0"/>
-          <a:chExt cx="0" cy="0"/>
-        </a:xfrm>
-      </p:grpSpPr>
-      <p:sp>
-        <p:nvSpPr>
-          <p:cNvPr id="4" name="テキスト ボックス 3">
-            <a:extLst>
-              <a:ext uri="{FF2B5EF4-FFF2-40B4-BE49-F238E27FC236}">
-                <a16:creationId xmlns:a16="http://schemas.microsoft.com/office/drawing/2014/main" id="{5A13BF46-B8C5-48AA-8308-C9ECFF431A18}"/>
-              </a:ext>
-            </a:extLst>
-          </p:cNvPr>
-          <p:cNvSpPr txBox="1"/>
-          <p:nvPr/>
-        </p:nvSpPr>
-        <p:spPr>
-          <a:xfrm>
-            <a:off x="567542" y="491954"/>
-            <a:ext cx="3057247" cy="584775"/>
-          </a:xfrm>
-          <a:prstGeom prst="rect">
-            <a:avLst/>
-          </a:prstGeom>
-          <a:noFill/>
-        </p:spPr>
-        <p:txBody>
-          <a:bodyPr wrap="none" rtlCol="0">
-            <a:spAutoFit/>
-          </a:bodyPr>
-          <a:lstStyle/>
-          <a:p>
-            <a:r>
-              <a:rPr lang="ja-JP" altLang="en-US" sz="3200" b="1" u="sng" dirty="0"/>
-              <a:t>シャドウマップ</a:t>
-            </a:r>
-            <a:endParaRPr kumimoji="1" lang="en-US" altLang="ja-JP" sz="3200" b="1" u="sng" dirty="0"/>
-          </a:p>
-        </p:txBody>
-      </p:sp>
-      <p:sp>
-        <p:nvSpPr>
-          <p:cNvPr id="6" name="テキスト ボックス 5">
-            <a:extLst>
-              <a:ext uri="{FF2B5EF4-FFF2-40B4-BE49-F238E27FC236}">
-                <a16:creationId xmlns:a16="http://schemas.microsoft.com/office/drawing/2014/main" id="{55830AD6-028B-4C4E-80BF-B70DFC1C3A46}"/>
-              </a:ext>
-            </a:extLst>
-          </p:cNvPr>
-          <p:cNvSpPr txBox="1"/>
-          <p:nvPr/>
-        </p:nvSpPr>
-        <p:spPr>
-          <a:xfrm>
-            <a:off x="567542" y="1216429"/>
-            <a:ext cx="7263527" cy="461665"/>
-          </a:xfrm>
-          <a:prstGeom prst="rect">
-            <a:avLst/>
-          </a:prstGeom>
-          <a:noFill/>
-        </p:spPr>
-        <p:txBody>
-          <a:bodyPr wrap="none" rtlCol="0">
-            <a:spAutoFit/>
-          </a:bodyPr>
-          <a:lstStyle/>
-          <a:p>
-            <a:r>
-              <a:rPr lang="ja-JP" altLang="en-US" sz="2400" dirty="0"/>
-              <a:t>つづいて</a:t>
-            </a:r>
-            <a:r>
-              <a:rPr lang="ja-JP" altLang="en-US" sz="2400" b="1" dirty="0">
-                <a:solidFill>
-                  <a:srgbClr val="FF0000"/>
-                </a:solidFill>
-              </a:rPr>
-              <a:t>影が映る描画モード</a:t>
-            </a:r>
-            <a:r>
-              <a:rPr lang="ja-JP" altLang="en-US" sz="2400" dirty="0"/>
-              <a:t>を終了する処理です。</a:t>
-            </a:r>
-            <a:endParaRPr lang="en-US" altLang="ja-JP" sz="2400" dirty="0"/>
-          </a:p>
-        </p:txBody>
-      </p:sp>
-      <p:pic>
-        <p:nvPicPr>
-          <p:cNvPr id="5" name="図 4">
-            <a:extLst>
-              <a:ext uri="{FF2B5EF4-FFF2-40B4-BE49-F238E27FC236}">
-                <a16:creationId xmlns:a16="http://schemas.microsoft.com/office/drawing/2014/main" id="{95E24969-2B10-478D-B9EE-F49A47E0F8DE}"/>
-              </a:ext>
-            </a:extLst>
-          </p:cNvPr>
-          <p:cNvPicPr>
-            <a:picLocks noChangeAspect="1"/>
-          </p:cNvPicPr>
-          <p:nvPr/>
-        </p:nvPicPr>
-        <p:blipFill>
-          <a:blip r:embed="rId2"/>
-          <a:stretch>
-            <a:fillRect/>
-          </a:stretch>
-        </p:blipFill>
-        <p:spPr>
-          <a:xfrm>
-            <a:off x="567542" y="1817793"/>
-            <a:ext cx="8629521" cy="1848273"/>
-          </a:xfrm>
-          <a:prstGeom prst="rect">
-            <a:avLst/>
-          </a:prstGeom>
-        </p:spPr>
-      </p:pic>
-      <p:sp>
-        <p:nvSpPr>
-          <p:cNvPr id="7" name="テキスト ボックス 6">
-            <a:extLst>
-              <a:ext uri="{FF2B5EF4-FFF2-40B4-BE49-F238E27FC236}">
-                <a16:creationId xmlns:a16="http://schemas.microsoft.com/office/drawing/2014/main" id="{91DDB2FF-2696-4515-A970-6EB1DA99324D}"/>
-              </a:ext>
-            </a:extLst>
-          </p:cNvPr>
-          <p:cNvSpPr txBox="1"/>
-          <p:nvPr/>
-        </p:nvSpPr>
-        <p:spPr>
-          <a:xfrm>
-            <a:off x="567542" y="3803225"/>
-            <a:ext cx="3877985" cy="461665"/>
-          </a:xfrm>
-          <a:prstGeom prst="rect">
-            <a:avLst/>
-          </a:prstGeom>
-          <a:noFill/>
-        </p:spPr>
-        <p:txBody>
-          <a:bodyPr wrap="none" rtlCol="0">
-            <a:spAutoFit/>
-          </a:bodyPr>
-          <a:lstStyle/>
-          <a:p>
-            <a:r>
-              <a:rPr lang="ja-JP" altLang="en-US" sz="2400" dirty="0"/>
-              <a:t>動作確認してみましょう。</a:t>
-            </a:r>
-            <a:endParaRPr lang="en-US" altLang="ja-JP" sz="2400" dirty="0"/>
-          </a:p>
-        </p:txBody>
-      </p:sp>
-    </p:spTree>
-    <p:extLst>
-      <p:ext uri="{BB962C8B-B14F-4D97-AF65-F5344CB8AC3E}">
-        <p14:creationId xmlns:p14="http://schemas.microsoft.com/office/powerpoint/2010/main" val="1346229858"/>
-      </p:ext>
-    </p:extLst>
-  </p:cSld>
-  <p:clrMapOvr>
-    <a:masterClrMapping/>
-  </p:clrMapOvr>
-</p:sld>
-</file>
-
-<file path=ppt/slides/slide13.xml><?xml version="1.0" encoding="utf-8"?>
-<p:sld xmlns:a="http://schemas.openxmlformats.org/drawingml/2006/main" xmlns:r="http://schemas.openxmlformats.org/officeDocument/2006/relationships" xmlns:p="http://schemas.openxmlformats.org/presentationml/2006/main">
-  <p:cSld>
-    <p:spTree>
-      <p:nvGrpSpPr>
-        <p:cNvPr id="1" name=""/>
-        <p:cNvGrpSpPr/>
-        <p:nvPr/>
-      </p:nvGrpSpPr>
-      <p:grpSpPr>
-        <a:xfrm>
-          <a:off x="0" y="0"/>
-          <a:ext cx="0" cy="0"/>
-          <a:chOff x="0" y="0"/>
-          <a:chExt cx="0" cy="0"/>
-        </a:xfrm>
-      </p:grpSpPr>
-      <p:sp>
-        <p:nvSpPr>
-          <p:cNvPr id="4" name="テキスト ボックス 3">
-            <a:extLst>
-              <a:ext uri="{FF2B5EF4-FFF2-40B4-BE49-F238E27FC236}">
-                <a16:creationId xmlns:a16="http://schemas.microsoft.com/office/drawing/2014/main" id="{5A13BF46-B8C5-48AA-8308-C9ECFF431A18}"/>
-              </a:ext>
-            </a:extLst>
-          </p:cNvPr>
-          <p:cNvSpPr txBox="1"/>
-          <p:nvPr/>
-        </p:nvSpPr>
-        <p:spPr>
-          <a:xfrm>
-            <a:off x="567542" y="491954"/>
-            <a:ext cx="3057247" cy="584775"/>
-          </a:xfrm>
-          <a:prstGeom prst="rect">
-            <a:avLst/>
-          </a:prstGeom>
-          <a:noFill/>
-        </p:spPr>
-        <p:txBody>
-          <a:bodyPr wrap="none" rtlCol="0">
-            <a:spAutoFit/>
-          </a:bodyPr>
-          <a:lstStyle/>
-          <a:p>
-            <a:r>
-              <a:rPr lang="ja-JP" altLang="en-US" sz="3200" b="1" u="sng" dirty="0"/>
-              <a:t>シャドウマップ</a:t>
-            </a:r>
-            <a:endParaRPr kumimoji="1" lang="en-US" altLang="ja-JP" sz="3200" b="1" u="sng" dirty="0"/>
-          </a:p>
-        </p:txBody>
-      </p:sp>
-      <p:sp>
-        <p:nvSpPr>
-          <p:cNvPr id="6" name="テキスト ボックス 5">
-            <a:extLst>
-              <a:ext uri="{FF2B5EF4-FFF2-40B4-BE49-F238E27FC236}">
-                <a16:creationId xmlns:a16="http://schemas.microsoft.com/office/drawing/2014/main" id="{55830AD6-028B-4C4E-80BF-B70DFC1C3A46}"/>
-              </a:ext>
-            </a:extLst>
-          </p:cNvPr>
-          <p:cNvSpPr txBox="1"/>
-          <p:nvPr/>
-        </p:nvSpPr>
-        <p:spPr>
-          <a:xfrm>
-            <a:off x="567542" y="1216429"/>
-            <a:ext cx="6647974" cy="1200329"/>
-          </a:xfrm>
-          <a:prstGeom prst="rect">
-            <a:avLst/>
-          </a:prstGeom>
-          <a:noFill/>
-        </p:spPr>
-        <p:txBody>
-          <a:bodyPr wrap="none" rtlCol="0">
-            <a:spAutoFit/>
-          </a:bodyPr>
-          <a:lstStyle/>
-          <a:p>
-            <a:r>
-              <a:rPr lang="ja-JP" altLang="en-US" sz="2400" dirty="0"/>
-              <a:t>今回はシャドウマップにプレイヤーを描いて、</a:t>
-            </a:r>
-            <a:endParaRPr lang="en-US" altLang="ja-JP" sz="2400" dirty="0"/>
-          </a:p>
-          <a:p>
-            <a:r>
-              <a:rPr lang="ja-JP" altLang="en-US" sz="2400" dirty="0"/>
-              <a:t>シャドウマップを床に映しています。</a:t>
-            </a:r>
-            <a:endParaRPr lang="en-US" altLang="ja-JP" sz="2400" dirty="0"/>
-          </a:p>
-          <a:p>
-            <a:r>
-              <a:rPr lang="ja-JP" altLang="en-US" sz="2400" dirty="0"/>
-              <a:t>つまり描画は以下のようになります。</a:t>
-            </a:r>
-            <a:endParaRPr lang="en-US" altLang="ja-JP" sz="2400" dirty="0"/>
-          </a:p>
-        </p:txBody>
-      </p:sp>
-      <p:pic>
-        <p:nvPicPr>
-          <p:cNvPr id="3" name="図 2">
-            <a:extLst>
-              <a:ext uri="{FF2B5EF4-FFF2-40B4-BE49-F238E27FC236}">
-                <a16:creationId xmlns:a16="http://schemas.microsoft.com/office/drawing/2014/main" id="{141FB4A8-971F-464D-8F60-30B40496180A}"/>
-              </a:ext>
-            </a:extLst>
-          </p:cNvPr>
-          <p:cNvPicPr>
-            <a:picLocks noChangeAspect="1"/>
-          </p:cNvPicPr>
-          <p:nvPr/>
-        </p:nvPicPr>
-        <p:blipFill>
-          <a:blip r:embed="rId2"/>
-          <a:stretch>
-            <a:fillRect/>
-          </a:stretch>
-        </p:blipFill>
-        <p:spPr>
-          <a:xfrm>
-            <a:off x="567542" y="2556458"/>
-            <a:ext cx="7788742" cy="3809588"/>
-          </a:xfrm>
-          <a:prstGeom prst="rect">
-            <a:avLst/>
-          </a:prstGeom>
-        </p:spPr>
-      </p:pic>
-    </p:spTree>
-    <p:extLst>
-      <p:ext uri="{BB962C8B-B14F-4D97-AF65-F5344CB8AC3E}">
-        <p14:creationId xmlns:p14="http://schemas.microsoft.com/office/powerpoint/2010/main" val="3322992340"/>
-      </p:ext>
-    </p:extLst>
-  </p:cSld>
-  <p:clrMapOvr>
-    <a:masterClrMapping/>
-  </p:clrMapOvr>
-</p:sld>
-</file>
-
-<file path=ppt/slides/slide14.xml><?xml version="1.0" encoding="utf-8"?>
-<p:sld xmlns:a="http://schemas.openxmlformats.org/drawingml/2006/main" xmlns:r="http://schemas.openxmlformats.org/officeDocument/2006/relationships" xmlns:p="http://schemas.openxmlformats.org/presentationml/2006/main">
-  <p:cSld>
-    <p:spTree>
-      <p:nvGrpSpPr>
-        <p:cNvPr id="1" name=""/>
-        <p:cNvGrpSpPr/>
-        <p:nvPr/>
-      </p:nvGrpSpPr>
-      <p:grpSpPr>
-        <a:xfrm>
-          <a:off x="0" y="0"/>
-          <a:ext cx="0" cy="0"/>
-          <a:chOff x="0" y="0"/>
-          <a:chExt cx="0" cy="0"/>
-        </a:xfrm>
-      </p:grpSpPr>
-      <p:sp>
-        <p:nvSpPr>
-          <p:cNvPr id="4" name="テキスト ボックス 3">
-            <a:extLst>
-              <a:ext uri="{FF2B5EF4-FFF2-40B4-BE49-F238E27FC236}">
-                <a16:creationId xmlns:a16="http://schemas.microsoft.com/office/drawing/2014/main" id="{5A13BF46-B8C5-48AA-8308-C9ECFF431A18}"/>
-              </a:ext>
-            </a:extLst>
-          </p:cNvPr>
-          <p:cNvSpPr txBox="1"/>
-          <p:nvPr/>
-        </p:nvSpPr>
-        <p:spPr>
-          <a:xfrm>
-            <a:off x="567542" y="491954"/>
-            <a:ext cx="3057247" cy="584775"/>
-          </a:xfrm>
-          <a:prstGeom prst="rect">
-            <a:avLst/>
-          </a:prstGeom>
-          <a:noFill/>
-        </p:spPr>
-        <p:txBody>
-          <a:bodyPr wrap="none" rtlCol="0">
-            <a:spAutoFit/>
-          </a:bodyPr>
-          <a:lstStyle/>
-          <a:p>
-            <a:r>
-              <a:rPr lang="ja-JP" altLang="en-US" sz="3200" b="1" u="sng" dirty="0"/>
-              <a:t>シャドウマップ</a:t>
-            </a:r>
-            <a:endParaRPr kumimoji="1" lang="en-US" altLang="ja-JP" sz="3200" b="1" u="sng" dirty="0"/>
-          </a:p>
-        </p:txBody>
-      </p:sp>
-      <p:sp>
-        <p:nvSpPr>
-          <p:cNvPr id="6" name="テキスト ボックス 5">
-            <a:extLst>
-              <a:ext uri="{FF2B5EF4-FFF2-40B4-BE49-F238E27FC236}">
-                <a16:creationId xmlns:a16="http://schemas.microsoft.com/office/drawing/2014/main" id="{55830AD6-028B-4C4E-80BF-B70DFC1C3A46}"/>
-              </a:ext>
-            </a:extLst>
-          </p:cNvPr>
-          <p:cNvSpPr txBox="1"/>
-          <p:nvPr/>
-        </p:nvSpPr>
-        <p:spPr>
-          <a:xfrm>
-            <a:off x="567542" y="1216429"/>
-            <a:ext cx="11264622" cy="1200329"/>
-          </a:xfrm>
-          <a:prstGeom prst="rect">
-            <a:avLst/>
-          </a:prstGeom>
-          <a:noFill/>
-        </p:spPr>
-        <p:txBody>
-          <a:bodyPr wrap="none" rtlCol="0">
-            <a:spAutoFit/>
-          </a:bodyPr>
-          <a:lstStyle/>
-          <a:p>
-            <a:r>
-              <a:rPr lang="ja-JP" altLang="en-US" sz="2400" b="1" dirty="0">
-                <a:solidFill>
-                  <a:srgbClr val="FF0000"/>
-                </a:solidFill>
-              </a:rPr>
-              <a:t>シャドウマップの解像度や、影の表示範囲はなるべく最小限に設定</a:t>
-            </a:r>
-            <a:r>
-              <a:rPr lang="ja-JP" altLang="en-US" sz="2400" dirty="0"/>
-              <a:t>しましょう。</a:t>
-            </a:r>
-            <a:endParaRPr lang="en-US" altLang="ja-JP" sz="2400" dirty="0"/>
-          </a:p>
-          <a:p>
-            <a:r>
-              <a:rPr lang="ja-JP" altLang="en-US" sz="2400" dirty="0"/>
-              <a:t>大きすぎると、メモリを大量に使用してしまったり、</a:t>
-            </a:r>
-            <a:endParaRPr lang="en-US" altLang="ja-JP" sz="2400" dirty="0"/>
-          </a:p>
-          <a:p>
-            <a:r>
-              <a:rPr lang="ja-JP" altLang="en-US" sz="2400" dirty="0"/>
-              <a:t>処理が非常に重くなったりします。</a:t>
-            </a:r>
-            <a:endParaRPr lang="en-US" altLang="ja-JP" sz="2400" dirty="0"/>
-          </a:p>
-        </p:txBody>
-      </p:sp>
-      <p:pic>
-        <p:nvPicPr>
-          <p:cNvPr id="5" name="図 4">
-            <a:extLst>
-              <a:ext uri="{FF2B5EF4-FFF2-40B4-BE49-F238E27FC236}">
-                <a16:creationId xmlns:a16="http://schemas.microsoft.com/office/drawing/2014/main" id="{EE395C9C-882E-4DCA-8609-A37C5E8E17C7}"/>
-              </a:ext>
-            </a:extLst>
-          </p:cNvPr>
-          <p:cNvPicPr>
-            <a:picLocks noChangeAspect="1"/>
-          </p:cNvPicPr>
-          <p:nvPr/>
-        </p:nvPicPr>
-        <p:blipFill>
-          <a:blip r:embed="rId2"/>
-          <a:stretch>
-            <a:fillRect/>
-          </a:stretch>
-        </p:blipFill>
-        <p:spPr>
-          <a:xfrm>
-            <a:off x="567541" y="2556458"/>
-            <a:ext cx="8108627" cy="1126542"/>
-          </a:xfrm>
-          <a:prstGeom prst="rect">
-            <a:avLst/>
-          </a:prstGeom>
-        </p:spPr>
-      </p:pic>
-      <p:sp>
-        <p:nvSpPr>
-          <p:cNvPr id="7" name="テキスト ボックス 6">
-            <a:extLst>
-              <a:ext uri="{FF2B5EF4-FFF2-40B4-BE49-F238E27FC236}">
-                <a16:creationId xmlns:a16="http://schemas.microsoft.com/office/drawing/2014/main" id="{F9AFC6CE-94C4-4605-A6E4-A58CA11EB00C}"/>
-              </a:ext>
-            </a:extLst>
-          </p:cNvPr>
-          <p:cNvSpPr txBox="1"/>
-          <p:nvPr/>
-        </p:nvSpPr>
-        <p:spPr>
-          <a:xfrm>
-            <a:off x="567542" y="3822700"/>
-            <a:ext cx="4493538" cy="461665"/>
-          </a:xfrm>
-          <a:prstGeom prst="rect">
-            <a:avLst/>
-          </a:prstGeom>
-          <a:noFill/>
-        </p:spPr>
-        <p:txBody>
-          <a:bodyPr wrap="none" rtlCol="0">
-            <a:spAutoFit/>
-          </a:bodyPr>
-          <a:lstStyle/>
-          <a:p>
-            <a:r>
-              <a:rPr lang="ja-JP" altLang="en-US" sz="2400" dirty="0"/>
-              <a:t>上の設定でも結構大きい。。。</a:t>
-            </a:r>
-            <a:endParaRPr lang="en-US" altLang="ja-JP" sz="2400" dirty="0"/>
-          </a:p>
-        </p:txBody>
-      </p:sp>
-    </p:spTree>
-    <p:extLst>
-      <p:ext uri="{BB962C8B-B14F-4D97-AF65-F5344CB8AC3E}">
-        <p14:creationId xmlns:p14="http://schemas.microsoft.com/office/powerpoint/2010/main" val="1995161271"/>
       </p:ext>
     </p:extLst>
   </p:cSld>
@@ -4578,7 +3755,7 @@
         <p:spPr>
           <a:xfrm>
             <a:off x="567542" y="491954"/>
-            <a:ext cx="3057247" cy="584775"/>
+            <a:ext cx="5109091" cy="584775"/>
           </a:xfrm>
           <a:prstGeom prst="rect">
             <a:avLst/>
@@ -4593,7 +3770,7 @@
           <a:p>
             <a:r>
               <a:rPr lang="ja-JP" altLang="en-US" sz="3200" b="1" u="sng" dirty="0"/>
-              <a:t>シャドウマップ</a:t>
+              <a:t>シューティングゲーム課題</a:t>
             </a:r>
             <a:endParaRPr kumimoji="1" lang="en-US" altLang="ja-JP" sz="3200" b="1" u="sng" dirty="0"/>
           </a:p>
@@ -4614,7 +3791,7 @@
         <p:spPr>
           <a:xfrm>
             <a:off x="567542" y="1216429"/>
-            <a:ext cx="8701421" cy="1569660"/>
+            <a:ext cx="4801314" cy="3046988"/>
           </a:xfrm>
           <a:prstGeom prst="rect">
             <a:avLst/>
@@ -4628,239 +3805,96 @@
           <a:lstStyle/>
           <a:p>
             <a:r>
-              <a:rPr lang="en-US" altLang="ja-JP" sz="2400" dirty="0" err="1"/>
-              <a:t>DxLib</a:t>
-            </a:r>
-            <a:r>
               <a:rPr lang="ja-JP" altLang="en-US" sz="2400" dirty="0"/>
-              <a:t>はデフォルトで</a:t>
-            </a:r>
+              <a:t>詳細は以下の通りです</a:t>
+            </a:r>
+            <a:endParaRPr lang="en-US" altLang="ja-JP" sz="2400" dirty="0"/>
+          </a:p>
+          <a:p>
+            <a:endParaRPr lang="en-US" altLang="ja-JP" sz="2400" dirty="0"/>
+          </a:p>
+          <a:p>
             <a:r>
               <a:rPr lang="ja-JP" altLang="en-US" sz="2400" b="1" dirty="0">
                 <a:solidFill>
                   <a:srgbClr val="FF0000"/>
                 </a:solidFill>
               </a:rPr>
-              <a:t>ディレクショナルライト（平行光源）</a:t>
-            </a:r>
+              <a:t>■最低限守ること</a:t>
+            </a:r>
+            <a:endParaRPr lang="en-US" altLang="ja-JP" sz="2400" b="1" dirty="0">
+              <a:solidFill>
+                <a:srgbClr val="FF0000"/>
+              </a:solidFill>
+            </a:endParaRPr>
+          </a:p>
+          <a:p>
             <a:r>
               <a:rPr lang="ja-JP" altLang="en-US" sz="2400" dirty="0"/>
-              <a:t>が</a:t>
+              <a:t>・画面比率は</a:t>
+            </a:r>
+            <a:r>
+              <a:rPr lang="en-US" altLang="ja-JP" sz="2400" dirty="0"/>
+              <a:t>16</a:t>
+            </a:r>
+            <a:r>
+              <a:rPr lang="ja-JP" altLang="en-US" sz="2400" dirty="0"/>
+              <a:t>：</a:t>
+            </a:r>
+            <a:r>
+              <a:rPr lang="en-US" altLang="ja-JP" sz="2400" dirty="0"/>
+              <a:t>9</a:t>
+            </a:r>
+          </a:p>
+          <a:p>
+            <a:r>
+              <a:rPr lang="ja-JP" altLang="en-US" sz="2400" dirty="0"/>
+              <a:t>・フルスクリーンに対応すること</a:t>
             </a:r>
             <a:endParaRPr lang="en-US" altLang="ja-JP" sz="2400" dirty="0"/>
           </a:p>
           <a:p>
             <a:r>
               <a:rPr lang="ja-JP" altLang="en-US" sz="2400" dirty="0"/>
-              <a:t>設定されています。</a:t>
-            </a:r>
+              <a:t>・締め切りは</a:t>
+            </a:r>
+            <a:r>
+              <a:rPr lang="en-US" altLang="ja-JP" sz="2400" dirty="0"/>
+              <a:t>5/23</a:t>
+            </a:r>
+            <a:r>
+              <a:rPr lang="ja-JP" altLang="en-US" sz="2400" dirty="0"/>
+              <a:t>（金）</a:t>
+            </a:r>
+            <a:r>
+              <a:rPr lang="en-US" altLang="ja-JP" sz="2400" dirty="0"/>
+              <a:t>17</a:t>
+            </a:r>
+            <a:r>
+              <a:rPr lang="ja-JP" altLang="en-US" sz="2400" dirty="0"/>
+              <a:t>：</a:t>
+            </a:r>
+            <a:r>
+              <a:rPr lang="en-US" altLang="ja-JP" sz="2400" dirty="0"/>
+              <a:t>00</a:t>
+            </a:r>
+          </a:p>
+          <a:p>
             <a:endParaRPr lang="en-US" altLang="ja-JP" sz="2400" dirty="0"/>
           </a:p>
           <a:p>
             <a:r>
               <a:rPr lang="ja-JP" altLang="en-US" sz="2400" dirty="0"/>
-              <a:t>ディレクショナルライトは、太陽光のように、</a:t>
+              <a:t>後は特に問いません。</a:t>
             </a:r>
             <a:endParaRPr lang="en-US" altLang="ja-JP" sz="2400" dirty="0"/>
           </a:p>
-          <a:p>
-            <a:r>
-              <a:rPr lang="ja-JP" altLang="en-US" sz="2400" b="1" dirty="0">
-                <a:solidFill>
-                  <a:srgbClr val="FF0000"/>
-                </a:solidFill>
-              </a:rPr>
-              <a:t>全てのオブジェクトに同じ向きに当たる光</a:t>
-            </a:r>
-            <a:r>
-              <a:rPr lang="ja-JP" altLang="en-US" sz="2400" dirty="0"/>
-              <a:t>になります。</a:t>
-            </a:r>
-            <a:endParaRPr lang="en-US" altLang="ja-JP" sz="2400" dirty="0"/>
-          </a:p>
-        </p:txBody>
-      </p:sp>
-      <p:sp>
-        <p:nvSpPr>
-          <p:cNvPr id="2" name="太陽 1">
-            <a:extLst>
-              <a:ext uri="{FF2B5EF4-FFF2-40B4-BE49-F238E27FC236}">
-                <a16:creationId xmlns:a16="http://schemas.microsoft.com/office/drawing/2014/main" id="{917C2884-98FB-4BC2-9B6D-010B02B1E528}"/>
-              </a:ext>
-            </a:extLst>
-          </p:cNvPr>
-          <p:cNvSpPr/>
-          <p:nvPr/>
-        </p:nvSpPr>
-        <p:spPr>
-          <a:xfrm>
-            <a:off x="567542" y="2925789"/>
-            <a:ext cx="1422400" cy="1346200"/>
-          </a:xfrm>
-          <a:prstGeom prst="sun">
-            <a:avLst/>
-          </a:prstGeom>
-          <a:solidFill>
-            <a:srgbClr val="FFC000"/>
-          </a:solidFill>
-          <a:ln>
-            <a:solidFill>
-              <a:srgbClr val="FFFF00"/>
-            </a:solidFill>
-          </a:ln>
-        </p:spPr>
-        <p:style>
-          <a:lnRef idx="2">
-            <a:schemeClr val="accent1">
-              <a:shade val="50000"/>
-            </a:schemeClr>
-          </a:lnRef>
-          <a:fillRef idx="1">
-            <a:schemeClr val="accent1"/>
-          </a:fillRef>
-          <a:effectRef idx="0">
-            <a:schemeClr val="accent1"/>
-          </a:effectRef>
-          <a:fontRef idx="minor">
-            <a:schemeClr val="lt1"/>
-          </a:fontRef>
-        </p:style>
-        <p:txBody>
-          <a:bodyPr rtlCol="0" anchor="ctr"/>
-          <a:lstStyle/>
-          <a:p>
-            <a:pPr algn="ctr"/>
-            <a:endParaRPr kumimoji="1" lang="ja-JP" altLang="en-US"/>
-          </a:p>
-        </p:txBody>
-      </p:sp>
-      <p:cxnSp>
-        <p:nvCxnSpPr>
-          <p:cNvPr id="7" name="直線コネクタ 6">
-            <a:extLst>
-              <a:ext uri="{FF2B5EF4-FFF2-40B4-BE49-F238E27FC236}">
-                <a16:creationId xmlns:a16="http://schemas.microsoft.com/office/drawing/2014/main" id="{D44D21B1-FCD3-48A3-9B77-AE018FC4BD4C}"/>
-              </a:ext>
-            </a:extLst>
-          </p:cNvPr>
-          <p:cNvCxnSpPr/>
-          <p:nvPr/>
-        </p:nvCxnSpPr>
-        <p:spPr>
-          <a:xfrm>
-            <a:off x="2071820" y="3996266"/>
-            <a:ext cx="1507067" cy="990600"/>
-          </a:xfrm>
-          <a:prstGeom prst="line">
-            <a:avLst/>
-          </a:prstGeom>
-          <a:ln w="76200">
-            <a:solidFill>
-              <a:srgbClr val="FFC000"/>
-            </a:solidFill>
-          </a:ln>
-        </p:spPr>
-        <p:style>
-          <a:lnRef idx="1">
-            <a:schemeClr val="accent1"/>
-          </a:lnRef>
-          <a:fillRef idx="0">
-            <a:schemeClr val="accent1"/>
-          </a:fillRef>
-          <a:effectRef idx="0">
-            <a:schemeClr val="accent1"/>
-          </a:effectRef>
-          <a:fontRef idx="minor">
-            <a:schemeClr val="tx1"/>
-          </a:fontRef>
-        </p:style>
-      </p:cxnSp>
-      <p:cxnSp>
-        <p:nvCxnSpPr>
-          <p:cNvPr id="8" name="直線コネクタ 7">
-            <a:extLst>
-              <a:ext uri="{FF2B5EF4-FFF2-40B4-BE49-F238E27FC236}">
-                <a16:creationId xmlns:a16="http://schemas.microsoft.com/office/drawing/2014/main" id="{50B18FB2-6E54-4D81-BE16-19655C7362ED}"/>
-              </a:ext>
-            </a:extLst>
-          </p:cNvPr>
-          <p:cNvCxnSpPr/>
-          <p:nvPr/>
-        </p:nvCxnSpPr>
-        <p:spPr>
-          <a:xfrm>
-            <a:off x="2117722" y="4339722"/>
-            <a:ext cx="1507067" cy="990600"/>
-          </a:xfrm>
-          <a:prstGeom prst="line">
-            <a:avLst/>
-          </a:prstGeom>
-          <a:ln w="76200">
-            <a:solidFill>
-              <a:srgbClr val="FFC000"/>
-            </a:solidFill>
-          </a:ln>
-        </p:spPr>
-        <p:style>
-          <a:lnRef idx="1">
-            <a:schemeClr val="accent1"/>
-          </a:lnRef>
-          <a:fillRef idx="0">
-            <a:schemeClr val="accent1"/>
-          </a:fillRef>
-          <a:effectRef idx="0">
-            <a:schemeClr val="accent1"/>
-          </a:effectRef>
-          <a:fontRef idx="minor">
-            <a:schemeClr val="tx1"/>
-          </a:fontRef>
-        </p:style>
-      </p:cxnSp>
-      <p:cxnSp>
-        <p:nvCxnSpPr>
-          <p:cNvPr id="9" name="直線コネクタ 8">
-            <a:extLst>
-              <a:ext uri="{FF2B5EF4-FFF2-40B4-BE49-F238E27FC236}">
-                <a16:creationId xmlns:a16="http://schemas.microsoft.com/office/drawing/2014/main" id="{BCE0192D-A833-41A3-A3F7-987016D4BD53}"/>
-              </a:ext>
-            </a:extLst>
-          </p:cNvPr>
-          <p:cNvCxnSpPr/>
-          <p:nvPr/>
-        </p:nvCxnSpPr>
-        <p:spPr>
-          <a:xfrm>
-            <a:off x="1701398" y="4491566"/>
-            <a:ext cx="1507067" cy="990600"/>
-          </a:xfrm>
-          <a:prstGeom prst="line">
-            <a:avLst/>
-          </a:prstGeom>
-          <a:ln w="76200">
-            <a:solidFill>
-              <a:srgbClr val="FFC000"/>
-            </a:solidFill>
-          </a:ln>
-        </p:spPr>
-        <p:style>
-          <a:lnRef idx="1">
-            <a:schemeClr val="accent1"/>
-          </a:lnRef>
-          <a:fillRef idx="0">
-            <a:schemeClr val="accent1"/>
-          </a:fillRef>
-          <a:effectRef idx="0">
-            <a:schemeClr val="accent1"/>
-          </a:effectRef>
-          <a:fontRef idx="minor">
-            <a:schemeClr val="tx1"/>
-          </a:fontRef>
-        </p:style>
-      </p:cxnSp>
+        </p:txBody>
+      </p:sp>
     </p:spTree>
     <p:extLst>
       <p:ext uri="{BB962C8B-B14F-4D97-AF65-F5344CB8AC3E}">
-        <p14:creationId xmlns:p14="http://schemas.microsoft.com/office/powerpoint/2010/main" val="2783424274"/>
+        <p14:creationId xmlns:p14="http://schemas.microsoft.com/office/powerpoint/2010/main" val="1252035369"/>
       </p:ext>
     </p:extLst>
   </p:cSld>
@@ -4902,7 +3936,7 @@
         <p:spPr>
           <a:xfrm>
             <a:off x="567542" y="491954"/>
-            <a:ext cx="3057247" cy="584775"/>
+            <a:ext cx="5109091" cy="584775"/>
           </a:xfrm>
           <a:prstGeom prst="rect">
             <a:avLst/>
@@ -4917,7 +3951,7 @@
           <a:p>
             <a:r>
               <a:rPr lang="ja-JP" altLang="en-US" sz="3200" b="1" u="sng" dirty="0"/>
-              <a:t>シャドウマップ</a:t>
+              <a:t>シューティングゲーム課題</a:t>
             </a:r>
             <a:endParaRPr kumimoji="1" lang="en-US" altLang="ja-JP" sz="3200" b="1" u="sng" dirty="0"/>
           </a:p>
@@ -4938,7 +3972,7 @@
         <p:spPr>
           <a:xfrm>
             <a:off x="567542" y="1216429"/>
-            <a:ext cx="10956846" cy="1200329"/>
+            <a:ext cx="6877204" cy="4893647"/>
           </a:xfrm>
           <a:prstGeom prst="rect">
             <a:avLst/>
@@ -4953,269 +3987,94 @@
           <a:p>
             <a:r>
               <a:rPr lang="ja-JP" altLang="en-US" sz="2400" dirty="0"/>
-              <a:t>影を表示するには、この光の向きから</a:t>
-            </a:r>
-            <a:r>
-              <a:rPr lang="ja-JP" altLang="en-US" sz="2400" b="1" dirty="0">
-                <a:solidFill>
-                  <a:srgbClr val="FF0000"/>
-                </a:solidFill>
-              </a:rPr>
-              <a:t>シャドウマップ</a:t>
-            </a:r>
+              <a:t>以下のようなものでも減点対象にはなりません</a:t>
+            </a:r>
+            <a:endParaRPr lang="en-US" altLang="ja-JP" sz="2400" dirty="0"/>
+          </a:p>
+          <a:p>
+            <a:endParaRPr lang="en-US" altLang="ja-JP" sz="2400" dirty="0"/>
+          </a:p>
+          <a:p>
             <a:r>
               <a:rPr lang="ja-JP" altLang="en-US" sz="2400" dirty="0"/>
-              <a:t>を作成します。</a:t>
+              <a:t>・画像は３</a:t>
+            </a:r>
+            <a:r>
+              <a:rPr lang="en-US" altLang="ja-JP" sz="2400" dirty="0"/>
+              <a:t>D</a:t>
+            </a:r>
+            <a:r>
+              <a:rPr lang="ja-JP" altLang="en-US" sz="2400" dirty="0"/>
+              <a:t>だけど横スクロール</a:t>
             </a:r>
             <a:endParaRPr lang="en-US" altLang="ja-JP" sz="2400" dirty="0"/>
           </a:p>
           <a:p>
             <a:r>
               <a:rPr lang="ja-JP" altLang="en-US" sz="2400" dirty="0"/>
-              <a:t>シャドウマップとは、</a:t>
+              <a:t>・発想を飛ばして祭りの射的ゲームをつくる</a:t>
             </a:r>
             <a:endParaRPr lang="en-US" altLang="ja-JP" sz="2400" dirty="0"/>
           </a:p>
           <a:p>
             <a:r>
-              <a:rPr lang="ja-JP" altLang="en-US" sz="2400" b="1" dirty="0">
-                <a:solidFill>
-                  <a:srgbClr val="FF0000"/>
-                </a:solidFill>
-              </a:rPr>
-              <a:t>光源から見た景色を描画</a:t>
-            </a:r>
-            <a:r>
               <a:rPr lang="ja-JP" altLang="en-US" sz="2400" dirty="0"/>
-              <a:t>し、それを</a:t>
-            </a:r>
-            <a:r>
-              <a:rPr lang="ja-JP" altLang="en-US" sz="2400" b="1" dirty="0">
-                <a:solidFill>
-                  <a:srgbClr val="FF0000"/>
-                </a:solidFill>
-              </a:rPr>
-              <a:t>黒く塗りつぶして１枚絵にした画像</a:t>
+              <a:t>・タイトル画面などゲーム画面以外は２</a:t>
+            </a:r>
+            <a:r>
+              <a:rPr lang="en-US" altLang="ja-JP" sz="2400" dirty="0"/>
+              <a:t>D</a:t>
             </a:r>
             <a:r>
               <a:rPr lang="ja-JP" altLang="en-US" sz="2400" dirty="0"/>
-              <a:t>です。</a:t>
-            </a:r>
+              <a:t>で</a:t>
+            </a:r>
+            <a:r>
+              <a:rPr lang="en-US" altLang="ja-JP" sz="2400" dirty="0"/>
+              <a:t>OK</a:t>
+            </a:r>
+          </a:p>
+          <a:p>
             <a:endParaRPr lang="en-US" altLang="ja-JP" sz="2400" dirty="0"/>
           </a:p>
-        </p:txBody>
-      </p:sp>
-      <p:pic>
-        <p:nvPicPr>
-          <p:cNvPr id="12" name="図 11">
-            <a:extLst>
-              <a:ext uri="{FF2B5EF4-FFF2-40B4-BE49-F238E27FC236}">
-                <a16:creationId xmlns:a16="http://schemas.microsoft.com/office/drawing/2014/main" id="{51D167E4-741F-403A-BFF9-369B43654502}"/>
-              </a:ext>
-            </a:extLst>
-          </p:cNvPr>
-          <p:cNvPicPr>
-            <a:picLocks noChangeAspect="1"/>
-          </p:cNvPicPr>
-          <p:nvPr/>
-        </p:nvPicPr>
-        <p:blipFill>
-          <a:blip r:embed="rId2"/>
-          <a:stretch>
-            <a:fillRect/>
-          </a:stretch>
-        </p:blipFill>
-        <p:spPr>
-          <a:xfrm>
-            <a:off x="567542" y="2556458"/>
-            <a:ext cx="3105583" cy="3229426"/>
-          </a:xfrm>
-          <a:prstGeom prst="rect">
-            <a:avLst/>
-          </a:prstGeom>
-        </p:spPr>
-      </p:pic>
-      <p:sp>
-        <p:nvSpPr>
-          <p:cNvPr id="13" name="テキスト ボックス 12">
-            <a:extLst>
-              <a:ext uri="{FF2B5EF4-FFF2-40B4-BE49-F238E27FC236}">
-                <a16:creationId xmlns:a16="http://schemas.microsoft.com/office/drawing/2014/main" id="{2B33D82C-102B-49C2-92F3-1DD96017D0C5}"/>
-              </a:ext>
-            </a:extLst>
-          </p:cNvPr>
-          <p:cNvSpPr txBox="1"/>
-          <p:nvPr/>
-        </p:nvSpPr>
-        <p:spPr>
-          <a:xfrm>
-            <a:off x="464949" y="5925584"/>
-            <a:ext cx="2954655" cy="461665"/>
-          </a:xfrm>
-          <a:prstGeom prst="rect">
-            <a:avLst/>
-          </a:prstGeom>
-          <a:noFill/>
-        </p:spPr>
-        <p:txBody>
-          <a:bodyPr wrap="none" rtlCol="0">
-            <a:spAutoFit/>
-          </a:bodyPr>
-          <a:lstStyle/>
           <a:p>
             <a:r>
               <a:rPr lang="ja-JP" altLang="en-US" sz="2400" dirty="0"/>
-              <a:t>太陽から見た景色を</a:t>
+              <a:t>以下のようなものはだめです。</a:t>
             </a:r>
             <a:endParaRPr lang="en-US" altLang="ja-JP" sz="2400" dirty="0"/>
           </a:p>
-        </p:txBody>
-      </p:sp>
-      <p:pic>
-        <p:nvPicPr>
-          <p:cNvPr id="15" name="図 14">
-            <a:extLst>
-              <a:ext uri="{FF2B5EF4-FFF2-40B4-BE49-F238E27FC236}">
-                <a16:creationId xmlns:a16="http://schemas.microsoft.com/office/drawing/2014/main" id="{618528D9-27BC-49DB-A48E-F106673C0F22}"/>
-              </a:ext>
-            </a:extLst>
-          </p:cNvPr>
-          <p:cNvPicPr>
-            <a:picLocks noChangeAspect="1"/>
-          </p:cNvPicPr>
-          <p:nvPr/>
-        </p:nvPicPr>
-        <p:blipFill>
-          <a:blip r:embed="rId3"/>
-          <a:stretch>
-            <a:fillRect/>
-          </a:stretch>
-        </p:blipFill>
-        <p:spPr>
-          <a:xfrm>
-            <a:off x="4159932" y="2556458"/>
-            <a:ext cx="2980324" cy="3229426"/>
-          </a:xfrm>
-          <a:prstGeom prst="rect">
-            <a:avLst/>
-          </a:prstGeom>
-        </p:spPr>
-      </p:pic>
-      <p:sp>
-        <p:nvSpPr>
-          <p:cNvPr id="16" name="テキスト ボックス 15">
-            <a:extLst>
-              <a:ext uri="{FF2B5EF4-FFF2-40B4-BE49-F238E27FC236}">
-                <a16:creationId xmlns:a16="http://schemas.microsoft.com/office/drawing/2014/main" id="{8D939538-BED5-44E9-87B1-3EF102DBDAF4}"/>
-              </a:ext>
-            </a:extLst>
-          </p:cNvPr>
-          <p:cNvSpPr txBox="1"/>
-          <p:nvPr/>
-        </p:nvSpPr>
-        <p:spPr>
-          <a:xfrm>
-            <a:off x="4264412" y="5925584"/>
-            <a:ext cx="2646878" cy="830997"/>
-          </a:xfrm>
-          <a:prstGeom prst="rect">
-            <a:avLst/>
-          </a:prstGeom>
-          <a:noFill/>
-        </p:spPr>
-        <p:txBody>
-          <a:bodyPr wrap="none" rtlCol="0">
-            <a:spAutoFit/>
-          </a:bodyPr>
-          <a:lstStyle/>
+          <a:p>
+            <a:endParaRPr lang="en-US" altLang="ja-JP" sz="2400" dirty="0"/>
+          </a:p>
           <a:p>
             <a:r>
               <a:rPr lang="ja-JP" altLang="en-US" sz="2400" dirty="0"/>
-              <a:t>黒く塗りつぶして</a:t>
+              <a:t>・シューティングとは程遠いもの</a:t>
             </a:r>
             <a:endParaRPr lang="en-US" altLang="ja-JP" sz="2400" dirty="0"/>
           </a:p>
           <a:p>
             <a:r>
-              <a:rPr lang="en-US" altLang="ja-JP" sz="2400" dirty="0"/>
-              <a:t>(</a:t>
-            </a:r>
-            <a:r>
-              <a:rPr lang="ja-JP" altLang="en-US" sz="2400" b="1" dirty="0">
-                <a:solidFill>
-                  <a:srgbClr val="FF0000"/>
-                </a:solidFill>
-              </a:rPr>
-              <a:t>シャドウマップ</a:t>
-            </a:r>
-            <a:r>
-              <a:rPr lang="en-US" altLang="ja-JP" sz="2400" dirty="0"/>
-              <a:t>)</a:t>
-            </a:r>
-          </a:p>
-        </p:txBody>
-      </p:sp>
-      <p:pic>
-        <p:nvPicPr>
-          <p:cNvPr id="20" name="図 19">
-            <a:extLst>
-              <a:ext uri="{FF2B5EF4-FFF2-40B4-BE49-F238E27FC236}">
-                <a16:creationId xmlns:a16="http://schemas.microsoft.com/office/drawing/2014/main" id="{3A1F5E11-A1BC-42D9-AD1A-3924450CE980}"/>
-              </a:ext>
-            </a:extLst>
-          </p:cNvPr>
-          <p:cNvPicPr>
-            <a:picLocks noChangeAspect="1"/>
-          </p:cNvPicPr>
-          <p:nvPr/>
-        </p:nvPicPr>
-        <p:blipFill>
-          <a:blip r:embed="rId4"/>
-          <a:stretch>
-            <a:fillRect/>
-          </a:stretch>
-        </p:blipFill>
-        <p:spPr>
-          <a:xfrm>
-            <a:off x="7428757" y="2556457"/>
-            <a:ext cx="3354840" cy="3229425"/>
-          </a:xfrm>
-          <a:prstGeom prst="rect">
-            <a:avLst/>
-          </a:prstGeom>
-        </p:spPr>
-      </p:pic>
-      <p:sp>
-        <p:nvSpPr>
-          <p:cNvPr id="21" name="テキスト ボックス 20">
-            <a:extLst>
-              <a:ext uri="{FF2B5EF4-FFF2-40B4-BE49-F238E27FC236}">
-                <a16:creationId xmlns:a16="http://schemas.microsoft.com/office/drawing/2014/main" id="{57196091-03B1-4FC6-9DE9-D0BB19B4144E}"/>
-              </a:ext>
-            </a:extLst>
-          </p:cNvPr>
-          <p:cNvSpPr txBox="1"/>
-          <p:nvPr/>
-        </p:nvSpPr>
-        <p:spPr>
-          <a:xfrm>
-            <a:off x="7628849" y="5925581"/>
-            <a:ext cx="2954655" cy="461665"/>
-          </a:xfrm>
-          <a:prstGeom prst="rect">
-            <a:avLst/>
-          </a:prstGeom>
-          <a:noFill/>
-        </p:spPr>
-        <p:txBody>
-          <a:bodyPr wrap="none" rtlCol="0">
-            <a:spAutoFit/>
-          </a:bodyPr>
-          <a:lstStyle/>
-          <a:p>
-            <a:r>
               <a:rPr lang="ja-JP" altLang="en-US" sz="2400" dirty="0"/>
-              <a:t>床に描けば影になる</a:t>
+              <a:t>　・ジャンプして障害物をよけるだけ</a:t>
+            </a:r>
+            <a:endParaRPr lang="en-US" altLang="ja-JP" sz="2400" dirty="0"/>
+          </a:p>
+          <a:p>
+            <a:endParaRPr lang="en-US" altLang="ja-JP" sz="2400" dirty="0"/>
+          </a:p>
+          <a:p>
+            <a:r>
+              <a:rPr lang="ja-JP" altLang="en-US" sz="2400" dirty="0"/>
+              <a:t>シューティングかどうか判断できない場合は、</a:t>
+            </a:r>
+            <a:endParaRPr lang="en-US" altLang="ja-JP" sz="2400" dirty="0"/>
+          </a:p>
+          <a:p>
+            <a:r>
+              <a:rPr lang="ja-JP" altLang="en-US" sz="2400" dirty="0"/>
+              <a:t>必ず作業前に荒木まで質問すること。</a:t>
             </a:r>
             <a:endParaRPr lang="en-US" altLang="ja-JP" sz="2400" dirty="0"/>
           </a:p>
@@ -5224,7 +4083,7 @@
     </p:spTree>
     <p:extLst>
       <p:ext uri="{BB962C8B-B14F-4D97-AF65-F5344CB8AC3E}">
-        <p14:creationId xmlns:p14="http://schemas.microsoft.com/office/powerpoint/2010/main" val="3943446309"/>
+        <p14:creationId xmlns:p14="http://schemas.microsoft.com/office/powerpoint/2010/main" val="4208713299"/>
       </p:ext>
     </p:extLst>
   </p:cSld>
@@ -5266,7 +4125,7 @@
         <p:spPr>
           <a:xfrm>
             <a:off x="567542" y="491954"/>
-            <a:ext cx="3057247" cy="584775"/>
+            <a:ext cx="5109091" cy="584775"/>
           </a:xfrm>
           <a:prstGeom prst="rect">
             <a:avLst/>
@@ -5281,7 +4140,7 @@
           <a:p>
             <a:r>
               <a:rPr lang="ja-JP" altLang="en-US" sz="3200" b="1" u="sng" dirty="0"/>
-              <a:t>シャドウマップ</a:t>
+              <a:t>シューティングゲーム課題</a:t>
             </a:r>
             <a:endParaRPr kumimoji="1" lang="en-US" altLang="ja-JP" sz="3200" b="1" u="sng" dirty="0"/>
           </a:p>
@@ -5302,7 +4161,7 @@
         <p:spPr>
           <a:xfrm>
             <a:off x="567542" y="1216429"/>
-            <a:ext cx="5147563" cy="461665"/>
+            <a:ext cx="5618846" cy="2308324"/>
           </a:xfrm>
           <a:prstGeom prst="rect">
             <a:avLst/>
@@ -5316,55 +4175,88 @@
           <a:lstStyle/>
           <a:p>
             <a:r>
-              <a:rPr lang="en-US" altLang="ja-JP" sz="2400" b="1" dirty="0">
-                <a:solidFill>
-                  <a:srgbClr val="FF0000"/>
-                </a:solidFill>
-              </a:rPr>
-              <a:t>ShadowMap.cpp</a:t>
-            </a:r>
-            <a:r>
               <a:rPr lang="ja-JP" altLang="en-US" sz="2400" dirty="0"/>
-              <a:t>を完成させます。</a:t>
+              <a:t>以下のゲームが参考となります</a:t>
             </a:r>
             <a:endParaRPr lang="en-US" altLang="ja-JP" sz="2400" dirty="0"/>
           </a:p>
-        </p:txBody>
-      </p:sp>
-      <p:pic>
-        <p:nvPicPr>
-          <p:cNvPr id="3" name="図 2">
-            <a:extLst>
-              <a:ext uri="{FF2B5EF4-FFF2-40B4-BE49-F238E27FC236}">
-                <a16:creationId xmlns:a16="http://schemas.microsoft.com/office/drawing/2014/main" id="{1E77A770-41B3-4D85-95E3-958905685039}"/>
-              </a:ext>
-            </a:extLst>
-          </p:cNvPr>
-          <p:cNvPicPr>
-            <a:picLocks noChangeAspect="1"/>
-          </p:cNvPicPr>
-          <p:nvPr/>
-        </p:nvPicPr>
-        <p:blipFill>
-          <a:blip r:embed="rId2"/>
-          <a:stretch>
-            <a:fillRect/>
-          </a:stretch>
-        </p:blipFill>
-        <p:spPr>
-          <a:xfrm>
-            <a:off x="567542" y="1817794"/>
-            <a:ext cx="4952725" cy="4544854"/>
-          </a:xfrm>
-          <a:prstGeom prst="rect">
-            <a:avLst/>
-          </a:prstGeom>
-        </p:spPr>
-      </p:pic>
+          <a:p>
+            <a:endParaRPr lang="en-US" altLang="ja-JP" sz="2400" dirty="0"/>
+          </a:p>
+          <a:p>
+            <a:r>
+              <a:rPr lang="ja-JP" altLang="en-US" sz="2400" dirty="0"/>
+              <a:t>・ガンバレット（アーケード、</a:t>
+            </a:r>
+            <a:r>
+              <a:rPr lang="en-US" altLang="ja-JP" sz="2400" dirty="0"/>
+              <a:t>PS</a:t>
+            </a:r>
+            <a:r>
+              <a:rPr lang="ja-JP" altLang="en-US" sz="2400" dirty="0"/>
+              <a:t>）</a:t>
+            </a:r>
+            <a:endParaRPr lang="en-US" altLang="ja-JP" sz="2400" dirty="0"/>
+          </a:p>
+          <a:p>
+            <a:r>
+              <a:rPr lang="ja-JP" altLang="en-US" sz="2400" dirty="0"/>
+              <a:t>・タイムクライシス（アーケード）</a:t>
+            </a:r>
+            <a:endParaRPr lang="en-US" altLang="ja-JP" sz="2400" dirty="0"/>
+          </a:p>
+          <a:p>
+            <a:r>
+              <a:rPr lang="ja-JP" altLang="en-US" sz="2400" dirty="0"/>
+              <a:t>・</a:t>
+            </a:r>
+            <a:r>
+              <a:rPr lang="en-US" altLang="ja-JP" sz="2400" dirty="0"/>
+              <a:t>House Of the Dead</a:t>
+            </a:r>
+            <a:r>
+              <a:rPr lang="ja-JP" altLang="en-US" sz="2400" dirty="0"/>
+              <a:t>（アーケード）</a:t>
+            </a:r>
+            <a:endParaRPr lang="en-US" altLang="ja-JP" sz="2400" dirty="0"/>
+          </a:p>
+          <a:p>
+            <a:r>
+              <a:rPr lang="ja-JP" altLang="en-US" sz="2400" dirty="0"/>
+              <a:t>・</a:t>
+            </a:r>
+            <a:r>
+              <a:rPr lang="en-US" altLang="ja-JP" sz="2400" dirty="0"/>
+              <a:t>R-TYPE Dimensions </a:t>
+            </a:r>
+            <a:r>
+              <a:rPr lang="ja-JP" altLang="en-US" sz="2400" dirty="0"/>
+              <a:t>（</a:t>
+            </a:r>
+            <a:r>
+              <a:rPr lang="en-US" altLang="ja-JP" sz="2400" dirty="0"/>
+              <a:t>PS</a:t>
+            </a:r>
+            <a:r>
+              <a:rPr lang="ja-JP" altLang="en-US" sz="2400" dirty="0"/>
+              <a:t>、</a:t>
+            </a:r>
+            <a:r>
+              <a:rPr lang="en-US" altLang="ja-JP" sz="2400" dirty="0"/>
+              <a:t>XBOX</a:t>
+            </a:r>
+            <a:r>
+              <a:rPr lang="ja-JP" altLang="en-US" sz="2400" dirty="0"/>
+              <a:t>）</a:t>
+            </a:r>
+            <a:endParaRPr lang="en-US" altLang="ja-JP" sz="2400" dirty="0"/>
+          </a:p>
+        </p:txBody>
+      </p:sp>
     </p:spTree>
     <p:extLst>
       <p:ext uri="{BB962C8B-B14F-4D97-AF65-F5344CB8AC3E}">
-        <p14:creationId xmlns:p14="http://schemas.microsoft.com/office/powerpoint/2010/main" val="2789946364"/>
+        <p14:creationId xmlns:p14="http://schemas.microsoft.com/office/powerpoint/2010/main" val="3384502285"/>
       </p:ext>
     </p:extLst>
   </p:cSld>
@@ -5406,7 +4298,7 @@
         <p:spPr>
           <a:xfrm>
             <a:off x="567542" y="491954"/>
-            <a:ext cx="3057247" cy="584775"/>
+            <a:ext cx="5109091" cy="584775"/>
           </a:xfrm>
           <a:prstGeom prst="rect">
             <a:avLst/>
@@ -5421,7 +4313,7 @@
           <a:p>
             <a:r>
               <a:rPr lang="ja-JP" altLang="en-US" sz="3200" b="1" u="sng" dirty="0"/>
-              <a:t>シャドウマップ</a:t>
+              <a:t>シューティングゲーム課題</a:t>
             </a:r>
             <a:endParaRPr kumimoji="1" lang="en-US" altLang="ja-JP" sz="3200" b="1" u="sng" dirty="0"/>
           </a:p>
@@ -5442,7 +4334,7 @@
         <p:spPr>
           <a:xfrm>
             <a:off x="567542" y="1216429"/>
-            <a:ext cx="3142207" cy="461665"/>
+            <a:ext cx="9417963" cy="2677656"/>
           </a:xfrm>
           <a:prstGeom prst="rect">
             <a:avLst/>
@@ -5456,756 +4348,83 @@
           <a:lstStyle/>
           <a:p>
             <a:r>
-              <a:rPr lang="en-US" altLang="ja-JP" sz="2400" b="1" dirty="0">
-                <a:solidFill>
-                  <a:srgbClr val="0070C0"/>
-                </a:solidFill>
-              </a:rPr>
-              <a:t>Init</a:t>
-            </a:r>
-            <a:r>
               <a:rPr lang="ja-JP" altLang="en-US" sz="2400" dirty="0"/>
-              <a:t>関数を書きます。</a:t>
+              <a:t>以下は注意点です</a:t>
             </a:r>
             <a:endParaRPr lang="en-US" altLang="ja-JP" sz="2400" dirty="0"/>
           </a:p>
-        </p:txBody>
-      </p:sp>
-      <p:pic>
-        <p:nvPicPr>
-          <p:cNvPr id="5" name="図 4">
-            <a:extLst>
-              <a:ext uri="{FF2B5EF4-FFF2-40B4-BE49-F238E27FC236}">
-                <a16:creationId xmlns:a16="http://schemas.microsoft.com/office/drawing/2014/main" id="{09BDDD0D-90AA-41E3-91DD-3FC812DAA775}"/>
-              </a:ext>
-            </a:extLst>
-          </p:cNvPr>
-          <p:cNvPicPr>
-            <a:picLocks noChangeAspect="1"/>
-          </p:cNvPicPr>
-          <p:nvPr/>
-        </p:nvPicPr>
-        <p:blipFill>
-          <a:blip r:embed="rId2"/>
-          <a:stretch>
-            <a:fillRect/>
-          </a:stretch>
-        </p:blipFill>
-        <p:spPr>
-          <a:xfrm>
-            <a:off x="567542" y="1817793"/>
-            <a:ext cx="10280694" cy="3823777"/>
-          </a:xfrm>
-          <a:prstGeom prst="rect">
-            <a:avLst/>
-          </a:prstGeom>
-        </p:spPr>
-      </p:pic>
+          <a:p>
+            <a:endParaRPr lang="en-US" altLang="ja-JP" sz="2400" dirty="0"/>
+          </a:p>
+          <a:p>
+            <a:r>
+              <a:rPr lang="ja-JP" altLang="en-US" sz="2400" dirty="0"/>
+              <a:t>・期間は短いです。期間と理解度に見合った作品を作りましょう。</a:t>
+            </a:r>
+            <a:endParaRPr lang="en-US" altLang="ja-JP" sz="2400" dirty="0"/>
+          </a:p>
+          <a:p>
+            <a:r>
+              <a:rPr lang="ja-JP" altLang="en-US" sz="2400" dirty="0"/>
+              <a:t>・３</a:t>
+            </a:r>
+            <a:r>
+              <a:rPr lang="en-US" altLang="ja-JP" sz="2400" dirty="0"/>
+              <a:t>D</a:t>
+            </a:r>
+            <a:r>
+              <a:rPr lang="ja-JP" altLang="en-US" sz="2400" dirty="0"/>
+              <a:t>モデルは</a:t>
+            </a:r>
+            <a:r>
+              <a:rPr lang="en-US" altLang="ja-JP" sz="2400" dirty="0"/>
+              <a:t>Blender</a:t>
+            </a:r>
+            <a:r>
+              <a:rPr lang="ja-JP" altLang="en-US" sz="2400" dirty="0"/>
+              <a:t>で作りましょう。</a:t>
+            </a:r>
+            <a:endParaRPr lang="en-US" altLang="ja-JP" sz="2400" dirty="0"/>
+          </a:p>
+          <a:p>
+            <a:r>
+              <a:rPr lang="ja-JP" altLang="en-US" sz="2400" dirty="0"/>
+              <a:t>　・３</a:t>
+            </a:r>
+            <a:r>
+              <a:rPr lang="en-US" altLang="ja-JP" sz="2400" dirty="0"/>
+              <a:t>D</a:t>
+            </a:r>
+            <a:r>
+              <a:rPr lang="ja-JP" altLang="en-US" sz="2400" dirty="0"/>
+              <a:t>のフリー素材は使いにくいものが多いです</a:t>
+            </a:r>
+            <a:endParaRPr lang="en-US" altLang="ja-JP" sz="2400" dirty="0"/>
+          </a:p>
+          <a:p>
+            <a:r>
+              <a:rPr lang="ja-JP" altLang="en-US" sz="2400" dirty="0"/>
+              <a:t>・画像はキューブ、球、コーン、ドーナッツなど</a:t>
+            </a:r>
+            <a:endParaRPr lang="en-US" altLang="ja-JP" sz="2400" dirty="0"/>
+          </a:p>
+          <a:p>
+            <a:r>
+              <a:rPr lang="ja-JP" altLang="en-US" sz="2400" dirty="0"/>
+              <a:t>　基本図形のものを組み合わせて作ると効率良い</a:t>
+            </a:r>
+            <a:r>
+              <a:rPr lang="ja-JP" altLang="en-US" sz="2400"/>
+              <a:t>です。</a:t>
+            </a:r>
+            <a:endParaRPr lang="en-US" altLang="ja-JP" sz="2400" dirty="0"/>
+          </a:p>
+        </p:txBody>
+      </p:sp>
     </p:spTree>
     <p:extLst>
       <p:ext uri="{BB962C8B-B14F-4D97-AF65-F5344CB8AC3E}">
-        <p14:creationId xmlns:p14="http://schemas.microsoft.com/office/powerpoint/2010/main" val="1959763976"/>
-      </p:ext>
-    </p:extLst>
-  </p:cSld>
-  <p:clrMapOvr>
-    <a:masterClrMapping/>
-  </p:clrMapOvr>
-</p:sld>
-</file>
-
-<file path=ppt/slides/slide6.xml><?xml version="1.0" encoding="utf-8"?>
-<p:sld xmlns:a="http://schemas.openxmlformats.org/drawingml/2006/main" xmlns:r="http://schemas.openxmlformats.org/officeDocument/2006/relationships" xmlns:p="http://schemas.openxmlformats.org/presentationml/2006/main">
-  <p:cSld>
-    <p:spTree>
-      <p:nvGrpSpPr>
-        <p:cNvPr id="1" name=""/>
-        <p:cNvGrpSpPr/>
-        <p:nvPr/>
-      </p:nvGrpSpPr>
-      <p:grpSpPr>
-        <a:xfrm>
-          <a:off x="0" y="0"/>
-          <a:ext cx="0" cy="0"/>
-          <a:chOff x="0" y="0"/>
-          <a:chExt cx="0" cy="0"/>
-        </a:xfrm>
-      </p:grpSpPr>
-      <p:sp>
-        <p:nvSpPr>
-          <p:cNvPr id="4" name="テキスト ボックス 3">
-            <a:extLst>
-              <a:ext uri="{FF2B5EF4-FFF2-40B4-BE49-F238E27FC236}">
-                <a16:creationId xmlns:a16="http://schemas.microsoft.com/office/drawing/2014/main" id="{5A13BF46-B8C5-48AA-8308-C9ECFF431A18}"/>
-              </a:ext>
-            </a:extLst>
-          </p:cNvPr>
-          <p:cNvSpPr txBox="1"/>
-          <p:nvPr/>
-        </p:nvSpPr>
-        <p:spPr>
-          <a:xfrm>
-            <a:off x="567542" y="491954"/>
-            <a:ext cx="3057247" cy="584775"/>
-          </a:xfrm>
-          <a:prstGeom prst="rect">
-            <a:avLst/>
-          </a:prstGeom>
-          <a:noFill/>
-        </p:spPr>
-        <p:txBody>
-          <a:bodyPr wrap="none" rtlCol="0">
-            <a:spAutoFit/>
-          </a:bodyPr>
-          <a:lstStyle/>
-          <a:p>
-            <a:r>
-              <a:rPr lang="ja-JP" altLang="en-US" sz="3200" b="1" u="sng" dirty="0"/>
-              <a:t>シャドウマップ</a:t>
-            </a:r>
-            <a:endParaRPr kumimoji="1" lang="en-US" altLang="ja-JP" sz="3200" b="1" u="sng" dirty="0"/>
-          </a:p>
-        </p:txBody>
-      </p:sp>
-      <p:sp>
-        <p:nvSpPr>
-          <p:cNvPr id="6" name="テキスト ボックス 5">
-            <a:extLst>
-              <a:ext uri="{FF2B5EF4-FFF2-40B4-BE49-F238E27FC236}">
-                <a16:creationId xmlns:a16="http://schemas.microsoft.com/office/drawing/2014/main" id="{55830AD6-028B-4C4E-80BF-B70DFC1C3A46}"/>
-              </a:ext>
-            </a:extLst>
-          </p:cNvPr>
-          <p:cNvSpPr txBox="1"/>
-          <p:nvPr/>
-        </p:nvSpPr>
-        <p:spPr>
-          <a:xfrm>
-            <a:off x="567542" y="1216429"/>
-            <a:ext cx="6647974" cy="830997"/>
-          </a:xfrm>
-          <a:prstGeom prst="rect">
-            <a:avLst/>
-          </a:prstGeom>
-          <a:noFill/>
-        </p:spPr>
-        <p:txBody>
-          <a:bodyPr wrap="none" rtlCol="0">
-            <a:spAutoFit/>
-          </a:bodyPr>
-          <a:lstStyle/>
-          <a:p>
-            <a:r>
-              <a:rPr lang="ja-JP" altLang="en-US" sz="2400" dirty="0"/>
-              <a:t>シャドウマップは</a:t>
-            </a:r>
-            <a:r>
-              <a:rPr lang="ja-JP" altLang="en-US" sz="2400" b="1" dirty="0">
-                <a:solidFill>
-                  <a:srgbClr val="FF0000"/>
-                </a:solidFill>
-              </a:rPr>
-              <a:t>影を書いていく一枚板</a:t>
-            </a:r>
-            <a:r>
-              <a:rPr lang="ja-JP" altLang="en-US" sz="2400" dirty="0"/>
-              <a:t>です。</a:t>
-            </a:r>
-            <a:endParaRPr lang="en-US" altLang="ja-JP" sz="2400" dirty="0"/>
-          </a:p>
-          <a:p>
-            <a:r>
-              <a:rPr lang="ja-JP" altLang="en-US" sz="2400" dirty="0"/>
-              <a:t>まずはその板を作ります。</a:t>
-            </a:r>
-            <a:endParaRPr lang="en-US" altLang="ja-JP" sz="2400" dirty="0"/>
-          </a:p>
-        </p:txBody>
-      </p:sp>
-      <p:pic>
-        <p:nvPicPr>
-          <p:cNvPr id="3" name="図 2">
-            <a:extLst>
-              <a:ext uri="{FF2B5EF4-FFF2-40B4-BE49-F238E27FC236}">
-                <a16:creationId xmlns:a16="http://schemas.microsoft.com/office/drawing/2014/main" id="{A5AEA7F5-AF48-4299-9511-70B686DF89A4}"/>
-              </a:ext>
-            </a:extLst>
-          </p:cNvPr>
-          <p:cNvPicPr>
-            <a:picLocks noChangeAspect="1"/>
-          </p:cNvPicPr>
-          <p:nvPr/>
-        </p:nvPicPr>
-        <p:blipFill>
-          <a:blip r:embed="rId2"/>
-          <a:stretch>
-            <a:fillRect/>
-          </a:stretch>
-        </p:blipFill>
-        <p:spPr>
-          <a:xfrm>
-            <a:off x="567542" y="2187126"/>
-            <a:ext cx="9448253" cy="911674"/>
-          </a:xfrm>
-          <a:prstGeom prst="rect">
-            <a:avLst/>
-          </a:prstGeom>
-        </p:spPr>
-      </p:pic>
-      <p:sp>
-        <p:nvSpPr>
-          <p:cNvPr id="7" name="テキスト ボックス 6">
-            <a:extLst>
-              <a:ext uri="{FF2B5EF4-FFF2-40B4-BE49-F238E27FC236}">
-                <a16:creationId xmlns:a16="http://schemas.microsoft.com/office/drawing/2014/main" id="{288FD08B-4617-47C8-BAB8-DA4220EEA913}"/>
-              </a:ext>
-            </a:extLst>
-          </p:cNvPr>
-          <p:cNvSpPr txBox="1"/>
-          <p:nvPr/>
-        </p:nvSpPr>
-        <p:spPr>
-          <a:xfrm>
-            <a:off x="567542" y="3238500"/>
-            <a:ext cx="7879080" cy="2308324"/>
-          </a:xfrm>
-          <a:prstGeom prst="rect">
-            <a:avLst/>
-          </a:prstGeom>
-          <a:noFill/>
-        </p:spPr>
-        <p:txBody>
-          <a:bodyPr wrap="none" rtlCol="0">
-            <a:spAutoFit/>
-          </a:bodyPr>
-          <a:lstStyle/>
-          <a:p>
-            <a:r>
-              <a:rPr lang="ja-JP" altLang="en-US" sz="2400" b="1" dirty="0">
-                <a:solidFill>
-                  <a:srgbClr val="FF0000"/>
-                </a:solidFill>
-              </a:rPr>
-              <a:t>引数は影の解像度</a:t>
-            </a:r>
-            <a:r>
-              <a:rPr lang="ja-JP" altLang="en-US" sz="2400" dirty="0"/>
-              <a:t>になります。</a:t>
-            </a:r>
-            <a:endParaRPr lang="en-US" altLang="ja-JP" sz="2400" dirty="0"/>
-          </a:p>
-          <a:p>
-            <a:r>
-              <a:rPr lang="ja-JP" altLang="en-US" sz="2400" dirty="0"/>
-              <a:t>数値が大きいほど細かくてきれいな影が描画されます。</a:t>
-            </a:r>
-            <a:endParaRPr lang="en-US" altLang="ja-JP" sz="2400" dirty="0"/>
-          </a:p>
-          <a:p>
-            <a:r>
-              <a:rPr lang="ja-JP" altLang="en-US" sz="2400" b="1" dirty="0">
-                <a:solidFill>
-                  <a:srgbClr val="FF0000"/>
-                </a:solidFill>
-              </a:rPr>
-              <a:t>必ず２のべき乗の数</a:t>
-            </a:r>
-            <a:r>
-              <a:rPr lang="ja-JP" altLang="en-US" sz="2400" dirty="0"/>
-              <a:t>でないといけません。</a:t>
-            </a:r>
-            <a:endParaRPr lang="en-US" altLang="ja-JP" sz="2400" dirty="0"/>
-          </a:p>
-          <a:p>
-            <a:endParaRPr lang="en-US" altLang="ja-JP" sz="2400" dirty="0"/>
-          </a:p>
-          <a:p>
-            <a:r>
-              <a:rPr lang="ja-JP" altLang="en-US" sz="2400" b="1" dirty="0">
-                <a:solidFill>
-                  <a:srgbClr val="FF0000"/>
-                </a:solidFill>
-              </a:rPr>
-              <a:t>戻り値はシャドウマップの画像ハンドル</a:t>
-            </a:r>
-            <a:r>
-              <a:rPr lang="ja-JP" altLang="en-US" sz="2400" dirty="0"/>
-              <a:t>なので、</a:t>
-            </a:r>
-            <a:endParaRPr lang="en-US" altLang="ja-JP" sz="2400" dirty="0"/>
-          </a:p>
-          <a:p>
-            <a:r>
-              <a:rPr lang="ja-JP" altLang="en-US" sz="2400" dirty="0"/>
-              <a:t>今後使うことになります。</a:t>
-            </a:r>
-            <a:endParaRPr lang="en-US" altLang="ja-JP" sz="2400" dirty="0"/>
-          </a:p>
-        </p:txBody>
-      </p:sp>
-    </p:spTree>
-    <p:extLst>
-      <p:ext uri="{BB962C8B-B14F-4D97-AF65-F5344CB8AC3E}">
-        <p14:creationId xmlns:p14="http://schemas.microsoft.com/office/powerpoint/2010/main" val="13519524"/>
-      </p:ext>
-    </p:extLst>
-  </p:cSld>
-  <p:clrMapOvr>
-    <a:masterClrMapping/>
-  </p:clrMapOvr>
-</p:sld>
-</file>
-
-<file path=ppt/slides/slide7.xml><?xml version="1.0" encoding="utf-8"?>
-<p:sld xmlns:a="http://schemas.openxmlformats.org/drawingml/2006/main" xmlns:r="http://schemas.openxmlformats.org/officeDocument/2006/relationships" xmlns:p="http://schemas.openxmlformats.org/presentationml/2006/main">
-  <p:cSld>
-    <p:spTree>
-      <p:nvGrpSpPr>
-        <p:cNvPr id="1" name=""/>
-        <p:cNvGrpSpPr/>
-        <p:nvPr/>
-      </p:nvGrpSpPr>
-      <p:grpSpPr>
-        <a:xfrm>
-          <a:off x="0" y="0"/>
-          <a:ext cx="0" cy="0"/>
-          <a:chOff x="0" y="0"/>
-          <a:chExt cx="0" cy="0"/>
-        </a:xfrm>
-      </p:grpSpPr>
-      <p:sp>
-        <p:nvSpPr>
-          <p:cNvPr id="4" name="テキスト ボックス 3">
-            <a:extLst>
-              <a:ext uri="{FF2B5EF4-FFF2-40B4-BE49-F238E27FC236}">
-                <a16:creationId xmlns:a16="http://schemas.microsoft.com/office/drawing/2014/main" id="{5A13BF46-B8C5-48AA-8308-C9ECFF431A18}"/>
-              </a:ext>
-            </a:extLst>
-          </p:cNvPr>
-          <p:cNvSpPr txBox="1"/>
-          <p:nvPr/>
-        </p:nvSpPr>
-        <p:spPr>
-          <a:xfrm>
-            <a:off x="567542" y="491954"/>
-            <a:ext cx="3057247" cy="584775"/>
-          </a:xfrm>
-          <a:prstGeom prst="rect">
-            <a:avLst/>
-          </a:prstGeom>
-          <a:noFill/>
-        </p:spPr>
-        <p:txBody>
-          <a:bodyPr wrap="none" rtlCol="0">
-            <a:spAutoFit/>
-          </a:bodyPr>
-          <a:lstStyle/>
-          <a:p>
-            <a:r>
-              <a:rPr lang="ja-JP" altLang="en-US" sz="3200" b="1" u="sng" dirty="0"/>
-              <a:t>シャドウマップ</a:t>
-            </a:r>
-            <a:endParaRPr kumimoji="1" lang="en-US" altLang="ja-JP" sz="3200" b="1" u="sng" dirty="0"/>
-          </a:p>
-        </p:txBody>
-      </p:sp>
-      <p:sp>
-        <p:nvSpPr>
-          <p:cNvPr id="6" name="テキスト ボックス 5">
-            <a:extLst>
-              <a:ext uri="{FF2B5EF4-FFF2-40B4-BE49-F238E27FC236}">
-                <a16:creationId xmlns:a16="http://schemas.microsoft.com/office/drawing/2014/main" id="{55830AD6-028B-4C4E-80BF-B70DFC1C3A46}"/>
-              </a:ext>
-            </a:extLst>
-          </p:cNvPr>
-          <p:cNvSpPr txBox="1"/>
-          <p:nvPr/>
-        </p:nvSpPr>
-        <p:spPr>
-          <a:xfrm>
-            <a:off x="567542" y="1216429"/>
-            <a:ext cx="6955750" cy="830997"/>
-          </a:xfrm>
-          <a:prstGeom prst="rect">
-            <a:avLst/>
-          </a:prstGeom>
-          <a:noFill/>
-        </p:spPr>
-        <p:txBody>
-          <a:bodyPr wrap="none" rtlCol="0">
-            <a:spAutoFit/>
-          </a:bodyPr>
-          <a:lstStyle/>
-          <a:p>
-            <a:r>
-              <a:rPr lang="ja-JP" altLang="en-US" sz="2400" dirty="0"/>
-              <a:t>次にディレクショナルライトの向きを取得して、</a:t>
-            </a:r>
-            <a:endParaRPr lang="en-US" altLang="ja-JP" sz="2400" dirty="0"/>
-          </a:p>
-          <a:p>
-            <a:r>
-              <a:rPr lang="ja-JP" altLang="en-US" sz="2400" dirty="0"/>
-              <a:t>シャドウマップに設定します。</a:t>
-            </a:r>
-            <a:endParaRPr lang="en-US" altLang="ja-JP" sz="2400" dirty="0"/>
-          </a:p>
-        </p:txBody>
-      </p:sp>
-      <p:pic>
-        <p:nvPicPr>
-          <p:cNvPr id="5" name="図 4">
-            <a:extLst>
-              <a:ext uri="{FF2B5EF4-FFF2-40B4-BE49-F238E27FC236}">
-                <a16:creationId xmlns:a16="http://schemas.microsoft.com/office/drawing/2014/main" id="{3C2BAA60-F505-4BB7-A111-69848FD22F2E}"/>
-              </a:ext>
-            </a:extLst>
-          </p:cNvPr>
-          <p:cNvPicPr>
-            <a:picLocks noChangeAspect="1"/>
-          </p:cNvPicPr>
-          <p:nvPr/>
-        </p:nvPicPr>
-        <p:blipFill>
-          <a:blip r:embed="rId2"/>
-          <a:stretch>
-            <a:fillRect/>
-          </a:stretch>
-        </p:blipFill>
-        <p:spPr>
-          <a:xfrm>
-            <a:off x="567542" y="2190577"/>
-            <a:ext cx="7990728" cy="1797223"/>
-          </a:xfrm>
-          <a:prstGeom prst="rect">
-            <a:avLst/>
-          </a:prstGeom>
-        </p:spPr>
-      </p:pic>
-    </p:spTree>
-    <p:extLst>
-      <p:ext uri="{BB962C8B-B14F-4D97-AF65-F5344CB8AC3E}">
-        <p14:creationId xmlns:p14="http://schemas.microsoft.com/office/powerpoint/2010/main" val="1992968208"/>
-      </p:ext>
-    </p:extLst>
-  </p:cSld>
-  <p:clrMapOvr>
-    <a:masterClrMapping/>
-  </p:clrMapOvr>
-</p:sld>
-</file>
-
-<file path=ppt/slides/slide8.xml><?xml version="1.0" encoding="utf-8"?>
-<p:sld xmlns:a="http://schemas.openxmlformats.org/drawingml/2006/main" xmlns:r="http://schemas.openxmlformats.org/officeDocument/2006/relationships" xmlns:p="http://schemas.openxmlformats.org/presentationml/2006/main">
-  <p:cSld>
-    <p:spTree>
-      <p:nvGrpSpPr>
-        <p:cNvPr id="1" name=""/>
-        <p:cNvGrpSpPr/>
-        <p:nvPr/>
-      </p:nvGrpSpPr>
-      <p:grpSpPr>
-        <a:xfrm>
-          <a:off x="0" y="0"/>
-          <a:ext cx="0" cy="0"/>
-          <a:chOff x="0" y="0"/>
-          <a:chExt cx="0" cy="0"/>
-        </a:xfrm>
-      </p:grpSpPr>
-      <p:sp>
-        <p:nvSpPr>
-          <p:cNvPr id="4" name="テキスト ボックス 3">
-            <a:extLst>
-              <a:ext uri="{FF2B5EF4-FFF2-40B4-BE49-F238E27FC236}">
-                <a16:creationId xmlns:a16="http://schemas.microsoft.com/office/drawing/2014/main" id="{5A13BF46-B8C5-48AA-8308-C9ECFF431A18}"/>
-              </a:ext>
-            </a:extLst>
-          </p:cNvPr>
-          <p:cNvSpPr txBox="1"/>
-          <p:nvPr/>
-        </p:nvSpPr>
-        <p:spPr>
-          <a:xfrm>
-            <a:off x="567542" y="491954"/>
-            <a:ext cx="3057247" cy="584775"/>
-          </a:xfrm>
-          <a:prstGeom prst="rect">
-            <a:avLst/>
-          </a:prstGeom>
-          <a:noFill/>
-        </p:spPr>
-        <p:txBody>
-          <a:bodyPr wrap="none" rtlCol="0">
-            <a:spAutoFit/>
-          </a:bodyPr>
-          <a:lstStyle/>
-          <a:p>
-            <a:r>
-              <a:rPr lang="ja-JP" altLang="en-US" sz="3200" b="1" u="sng" dirty="0"/>
-              <a:t>シャドウマップ</a:t>
-            </a:r>
-            <a:endParaRPr kumimoji="1" lang="en-US" altLang="ja-JP" sz="3200" b="1" u="sng" dirty="0"/>
-          </a:p>
-        </p:txBody>
-      </p:sp>
-      <p:sp>
-        <p:nvSpPr>
-          <p:cNvPr id="6" name="テキスト ボックス 5">
-            <a:extLst>
-              <a:ext uri="{FF2B5EF4-FFF2-40B4-BE49-F238E27FC236}">
-                <a16:creationId xmlns:a16="http://schemas.microsoft.com/office/drawing/2014/main" id="{55830AD6-028B-4C4E-80BF-B70DFC1C3A46}"/>
-              </a:ext>
-            </a:extLst>
-          </p:cNvPr>
-          <p:cNvSpPr txBox="1"/>
-          <p:nvPr/>
-        </p:nvSpPr>
-        <p:spPr>
-          <a:xfrm>
-            <a:off x="567542" y="1216429"/>
-            <a:ext cx="5931432" cy="830997"/>
-          </a:xfrm>
-          <a:prstGeom prst="rect">
-            <a:avLst/>
-          </a:prstGeom>
-          <a:noFill/>
-        </p:spPr>
-        <p:txBody>
-          <a:bodyPr wrap="none" rtlCol="0">
-            <a:spAutoFit/>
-          </a:bodyPr>
-          <a:lstStyle/>
-          <a:p>
-            <a:r>
-              <a:rPr lang="ja-JP" altLang="en-US" sz="2400" dirty="0"/>
-              <a:t>続いて影を表示する範囲を設定します。</a:t>
-            </a:r>
-            <a:endParaRPr lang="en-US" altLang="ja-JP" sz="2400" dirty="0"/>
-          </a:p>
-          <a:p>
-            <a:r>
-              <a:rPr lang="en-US" altLang="ja-JP" sz="2400" dirty="0" err="1"/>
-              <a:t>DxLib</a:t>
-            </a:r>
-            <a:r>
-              <a:rPr lang="ja-JP" altLang="en-US" sz="2400" dirty="0"/>
-              <a:t>の仕様上、必要な処理になります。</a:t>
-            </a:r>
-            <a:endParaRPr lang="en-US" altLang="ja-JP" sz="2400" dirty="0"/>
-          </a:p>
-        </p:txBody>
-      </p:sp>
-      <p:pic>
-        <p:nvPicPr>
-          <p:cNvPr id="3" name="図 2">
-            <a:extLst>
-              <a:ext uri="{FF2B5EF4-FFF2-40B4-BE49-F238E27FC236}">
-                <a16:creationId xmlns:a16="http://schemas.microsoft.com/office/drawing/2014/main" id="{60FABA42-3BD3-4DA5-9D3B-25C379D2B03D}"/>
-              </a:ext>
-            </a:extLst>
-          </p:cNvPr>
-          <p:cNvPicPr>
-            <a:picLocks noChangeAspect="1"/>
-          </p:cNvPicPr>
-          <p:nvPr/>
-        </p:nvPicPr>
-        <p:blipFill>
-          <a:blip r:embed="rId2"/>
-          <a:stretch>
-            <a:fillRect/>
-          </a:stretch>
-        </p:blipFill>
-        <p:spPr>
-          <a:xfrm>
-            <a:off x="567542" y="2187125"/>
-            <a:ext cx="10179100" cy="1021741"/>
-          </a:xfrm>
-          <a:prstGeom prst="rect">
-            <a:avLst/>
-          </a:prstGeom>
-        </p:spPr>
-      </p:pic>
-    </p:spTree>
-    <p:extLst>
-      <p:ext uri="{BB962C8B-B14F-4D97-AF65-F5344CB8AC3E}">
-        <p14:creationId xmlns:p14="http://schemas.microsoft.com/office/powerpoint/2010/main" val="1913809010"/>
-      </p:ext>
-    </p:extLst>
-  </p:cSld>
-  <p:clrMapOvr>
-    <a:masterClrMapping/>
-  </p:clrMapOvr>
-</p:sld>
-</file>
-
-<file path=ppt/slides/slide9.xml><?xml version="1.0" encoding="utf-8"?>
-<p:sld xmlns:a="http://schemas.openxmlformats.org/drawingml/2006/main" xmlns:r="http://schemas.openxmlformats.org/officeDocument/2006/relationships" xmlns:p="http://schemas.openxmlformats.org/presentationml/2006/main">
-  <p:cSld>
-    <p:spTree>
-      <p:nvGrpSpPr>
-        <p:cNvPr id="1" name=""/>
-        <p:cNvGrpSpPr/>
-        <p:nvPr/>
-      </p:nvGrpSpPr>
-      <p:grpSpPr>
-        <a:xfrm>
-          <a:off x="0" y="0"/>
-          <a:ext cx="0" cy="0"/>
-          <a:chOff x="0" y="0"/>
-          <a:chExt cx="0" cy="0"/>
-        </a:xfrm>
-      </p:grpSpPr>
-      <p:sp>
-        <p:nvSpPr>
-          <p:cNvPr id="4" name="テキスト ボックス 3">
-            <a:extLst>
-              <a:ext uri="{FF2B5EF4-FFF2-40B4-BE49-F238E27FC236}">
-                <a16:creationId xmlns:a16="http://schemas.microsoft.com/office/drawing/2014/main" id="{5A13BF46-B8C5-48AA-8308-C9ECFF431A18}"/>
-              </a:ext>
-            </a:extLst>
-          </p:cNvPr>
-          <p:cNvSpPr txBox="1"/>
-          <p:nvPr/>
-        </p:nvSpPr>
-        <p:spPr>
-          <a:xfrm>
-            <a:off x="567542" y="491954"/>
-            <a:ext cx="3057247" cy="584775"/>
-          </a:xfrm>
-          <a:prstGeom prst="rect">
-            <a:avLst/>
-          </a:prstGeom>
-          <a:noFill/>
-        </p:spPr>
-        <p:txBody>
-          <a:bodyPr wrap="none" rtlCol="0">
-            <a:spAutoFit/>
-          </a:bodyPr>
-          <a:lstStyle/>
-          <a:p>
-            <a:r>
-              <a:rPr lang="ja-JP" altLang="en-US" sz="3200" b="1" u="sng" dirty="0"/>
-              <a:t>シャドウマップ</a:t>
-            </a:r>
-            <a:endParaRPr kumimoji="1" lang="en-US" altLang="ja-JP" sz="3200" b="1" u="sng" dirty="0"/>
-          </a:p>
-        </p:txBody>
-      </p:sp>
-      <p:sp>
-        <p:nvSpPr>
-          <p:cNvPr id="6" name="テキスト ボックス 5">
-            <a:extLst>
-              <a:ext uri="{FF2B5EF4-FFF2-40B4-BE49-F238E27FC236}">
-                <a16:creationId xmlns:a16="http://schemas.microsoft.com/office/drawing/2014/main" id="{55830AD6-028B-4C4E-80BF-B70DFC1C3A46}"/>
-              </a:ext>
-            </a:extLst>
-          </p:cNvPr>
-          <p:cNvSpPr txBox="1"/>
-          <p:nvPr/>
-        </p:nvSpPr>
-        <p:spPr>
-          <a:xfrm>
-            <a:off x="567542" y="1216429"/>
-            <a:ext cx="9417963" cy="1569660"/>
-          </a:xfrm>
-          <a:prstGeom prst="rect">
-            <a:avLst/>
-          </a:prstGeom>
-          <a:noFill/>
-        </p:spPr>
-        <p:txBody>
-          <a:bodyPr wrap="none" rtlCol="0">
-            <a:spAutoFit/>
-          </a:bodyPr>
-          <a:lstStyle/>
-          <a:p>
-            <a:r>
-              <a:rPr lang="en-US" altLang="ja-JP" sz="2400" dirty="0" err="1"/>
-              <a:t>DxLib</a:t>
-            </a:r>
-            <a:r>
-              <a:rPr lang="ja-JP" altLang="en-US" sz="2400" dirty="0"/>
-              <a:t>のシャドウマップは、</a:t>
-            </a:r>
-            <a:endParaRPr lang="en-US" altLang="ja-JP" sz="2400" dirty="0"/>
-          </a:p>
-          <a:p>
-            <a:r>
-              <a:rPr lang="ja-JP" altLang="en-US" sz="2400" b="1" dirty="0">
-                <a:solidFill>
-                  <a:srgbClr val="FF0000"/>
-                </a:solidFill>
-              </a:rPr>
-              <a:t>影の描画と影が映る本体の描画で分けて描画する</a:t>
-            </a:r>
-            <a:r>
-              <a:rPr lang="ja-JP" altLang="en-US" sz="2400" dirty="0"/>
-              <a:t>仕様になります。</a:t>
-            </a:r>
-            <a:endParaRPr lang="en-US" altLang="ja-JP" sz="2400" dirty="0"/>
-          </a:p>
-          <a:p>
-            <a:r>
-              <a:rPr lang="ja-JP" altLang="en-US" sz="2400" dirty="0"/>
-              <a:t>それぞれ設定が必要になりますので、処理を書きます。</a:t>
-            </a:r>
-            <a:endParaRPr lang="en-US" altLang="ja-JP" sz="2400" dirty="0"/>
-          </a:p>
-          <a:p>
-            <a:r>
-              <a:rPr lang="ja-JP" altLang="en-US" sz="2400" dirty="0"/>
-              <a:t>まずは</a:t>
-            </a:r>
-            <a:r>
-              <a:rPr lang="ja-JP" altLang="en-US" sz="2400" b="1" dirty="0">
-                <a:solidFill>
-                  <a:srgbClr val="FF0000"/>
-                </a:solidFill>
-              </a:rPr>
-              <a:t>影描画モードに切り替える処理</a:t>
-            </a:r>
-            <a:r>
-              <a:rPr lang="ja-JP" altLang="en-US" sz="2400" dirty="0"/>
-              <a:t>です。</a:t>
-            </a:r>
-            <a:endParaRPr lang="en-US" altLang="ja-JP" sz="2400" dirty="0"/>
-          </a:p>
-        </p:txBody>
-      </p:sp>
-      <p:pic>
-        <p:nvPicPr>
-          <p:cNvPr id="3" name="図 2">
-            <a:extLst>
-              <a:ext uri="{FF2B5EF4-FFF2-40B4-BE49-F238E27FC236}">
-                <a16:creationId xmlns:a16="http://schemas.microsoft.com/office/drawing/2014/main" id="{CBB0D346-F0BC-4E64-ACC1-B62B8770A2F2}"/>
-              </a:ext>
-            </a:extLst>
-          </p:cNvPr>
-          <p:cNvPicPr>
-            <a:picLocks noChangeAspect="1"/>
-          </p:cNvPicPr>
-          <p:nvPr/>
-        </p:nvPicPr>
-        <p:blipFill>
-          <a:blip r:embed="rId2"/>
-          <a:stretch>
-            <a:fillRect/>
-          </a:stretch>
-        </p:blipFill>
-        <p:spPr>
-          <a:xfrm>
-            <a:off x="567542" y="2925789"/>
-            <a:ext cx="10424016" cy="2111878"/>
-          </a:xfrm>
-          <a:prstGeom prst="rect">
-            <a:avLst/>
-          </a:prstGeom>
-        </p:spPr>
-      </p:pic>
-    </p:spTree>
-    <p:extLst>
-      <p:ext uri="{BB962C8B-B14F-4D97-AF65-F5344CB8AC3E}">
-        <p14:creationId xmlns:p14="http://schemas.microsoft.com/office/powerpoint/2010/main" val="3515766324"/>
+        <p14:creationId xmlns:p14="http://schemas.microsoft.com/office/powerpoint/2010/main" val="3551193195"/>
       </p:ext>
     </p:extLst>
   </p:cSld>

--- a/ゲーム科2年/00_前期/ゲーム開発Ⅰ/19_シューティングゲーム課題.pptx
+++ b/ゲーム科2年/00_前期/ゲーム開発Ⅰ/19_シューティングゲーム課題.pptx
@@ -10,6 +10,7 @@
     <p:sldId id="261" r:id="rId4"/>
     <p:sldId id="262" r:id="rId5"/>
     <p:sldId id="263" r:id="rId6"/>
+    <p:sldId id="264" r:id="rId7"/>
   </p:sldIdLst>
   <p:sldSz cx="12192000" cy="6858000"/>
   <p:notesSz cx="6858000" cy="9144000"/>
@@ -275,7 +276,7 @@
           <a:p>
             <a:fld id="{E9CC885B-4903-4D54-9A93-00025F12DED9}" type="datetimeFigureOut">
               <a:rPr kumimoji="1" lang="ja-JP" altLang="en-US" smtClean="0"/>
-              <a:t>2025/4/21</a:t>
+              <a:t>2025/4/22</a:t>
             </a:fld>
             <a:endParaRPr kumimoji="1" lang="ja-JP" altLang="en-US"/>
           </a:p>
@@ -505,7 +506,7 @@
           <a:p>
             <a:fld id="{E9CC885B-4903-4D54-9A93-00025F12DED9}" type="datetimeFigureOut">
               <a:rPr kumimoji="1" lang="ja-JP" altLang="en-US" smtClean="0"/>
-              <a:t>2025/4/21</a:t>
+              <a:t>2025/4/22</a:t>
             </a:fld>
             <a:endParaRPr kumimoji="1" lang="ja-JP" altLang="en-US"/>
           </a:p>
@@ -745,7 +746,7 @@
           <a:p>
             <a:fld id="{E9CC885B-4903-4D54-9A93-00025F12DED9}" type="datetimeFigureOut">
               <a:rPr kumimoji="1" lang="ja-JP" altLang="en-US" smtClean="0"/>
-              <a:t>2025/4/21</a:t>
+              <a:t>2025/4/22</a:t>
             </a:fld>
             <a:endParaRPr kumimoji="1" lang="ja-JP" altLang="en-US"/>
           </a:p>
@@ -975,7 +976,7 @@
           <a:p>
             <a:fld id="{E9CC885B-4903-4D54-9A93-00025F12DED9}" type="datetimeFigureOut">
               <a:rPr kumimoji="1" lang="ja-JP" altLang="en-US" smtClean="0"/>
-              <a:t>2025/4/21</a:t>
+              <a:t>2025/4/22</a:t>
             </a:fld>
             <a:endParaRPr kumimoji="1" lang="ja-JP" altLang="en-US"/>
           </a:p>
@@ -1250,7 +1251,7 @@
           <a:p>
             <a:fld id="{E9CC885B-4903-4D54-9A93-00025F12DED9}" type="datetimeFigureOut">
               <a:rPr kumimoji="1" lang="ja-JP" altLang="en-US" smtClean="0"/>
-              <a:t>2025/4/21</a:t>
+              <a:t>2025/4/22</a:t>
             </a:fld>
             <a:endParaRPr kumimoji="1" lang="ja-JP" altLang="en-US"/>
           </a:p>
@@ -1579,7 +1580,7 @@
           <a:p>
             <a:fld id="{E9CC885B-4903-4D54-9A93-00025F12DED9}" type="datetimeFigureOut">
               <a:rPr kumimoji="1" lang="ja-JP" altLang="en-US" smtClean="0"/>
-              <a:t>2025/4/21</a:t>
+              <a:t>2025/4/22</a:t>
             </a:fld>
             <a:endParaRPr kumimoji="1" lang="ja-JP" altLang="en-US"/>
           </a:p>
@@ -2055,7 +2056,7 @@
           <a:p>
             <a:fld id="{E9CC885B-4903-4D54-9A93-00025F12DED9}" type="datetimeFigureOut">
               <a:rPr kumimoji="1" lang="ja-JP" altLang="en-US" smtClean="0"/>
-              <a:t>2025/4/21</a:t>
+              <a:t>2025/4/22</a:t>
             </a:fld>
             <a:endParaRPr kumimoji="1" lang="ja-JP" altLang="en-US"/>
           </a:p>
@@ -2196,7 +2197,7 @@
           <a:p>
             <a:fld id="{E9CC885B-4903-4D54-9A93-00025F12DED9}" type="datetimeFigureOut">
               <a:rPr kumimoji="1" lang="ja-JP" altLang="en-US" smtClean="0"/>
-              <a:t>2025/4/21</a:t>
+              <a:t>2025/4/22</a:t>
             </a:fld>
             <a:endParaRPr kumimoji="1" lang="ja-JP" altLang="en-US"/>
           </a:p>
@@ -2309,7 +2310,7 @@
           <a:p>
             <a:fld id="{E9CC885B-4903-4D54-9A93-00025F12DED9}" type="datetimeFigureOut">
               <a:rPr kumimoji="1" lang="ja-JP" altLang="en-US" smtClean="0"/>
-              <a:t>2025/4/21</a:t>
+              <a:t>2025/4/22</a:t>
             </a:fld>
             <a:endParaRPr kumimoji="1" lang="ja-JP" altLang="en-US"/>
           </a:p>
@@ -2652,7 +2653,7 @@
           <a:p>
             <a:fld id="{E9CC885B-4903-4D54-9A93-00025F12DED9}" type="datetimeFigureOut">
               <a:rPr kumimoji="1" lang="ja-JP" altLang="en-US" smtClean="0"/>
-              <a:t>2025/4/21</a:t>
+              <a:t>2025/4/22</a:t>
             </a:fld>
             <a:endParaRPr kumimoji="1" lang="ja-JP" altLang="en-US"/>
           </a:p>
@@ -2940,7 +2941,7 @@
           <a:p>
             <a:fld id="{E9CC885B-4903-4D54-9A93-00025F12DED9}" type="datetimeFigureOut">
               <a:rPr kumimoji="1" lang="ja-JP" altLang="en-US" smtClean="0"/>
-              <a:t>2025/4/21</a:t>
+              <a:t>2025/4/22</a:t>
             </a:fld>
             <a:endParaRPr kumimoji="1" lang="ja-JP" altLang="en-US"/>
           </a:p>
@@ -3213,7 +3214,7 @@
           <a:p>
             <a:fld id="{E9CC885B-4903-4D54-9A93-00025F12DED9}" type="datetimeFigureOut">
               <a:rPr kumimoji="1" lang="ja-JP" altLang="en-US" smtClean="0"/>
-              <a:t>2025/4/21</a:t>
+              <a:t>2025/4/22</a:t>
             </a:fld>
             <a:endParaRPr kumimoji="1" lang="ja-JP" altLang="en-US"/>
           </a:p>
@@ -4434,6 +4435,180 @@
 </p:sld>
 </file>
 
+<file path=ppt/slides/slide6.xml><?xml version="1.0" encoding="utf-8"?>
+<p:sld xmlns:a="http://schemas.openxmlformats.org/drawingml/2006/main" xmlns:r="http://schemas.openxmlformats.org/officeDocument/2006/relationships" xmlns:p="http://schemas.openxmlformats.org/presentationml/2006/main">
+  <p:cSld>
+    <p:spTree>
+      <p:nvGrpSpPr>
+        <p:cNvPr id="1" name=""/>
+        <p:cNvGrpSpPr/>
+        <p:nvPr/>
+      </p:nvGrpSpPr>
+      <p:grpSpPr>
+        <a:xfrm>
+          <a:off x="0" y="0"/>
+          <a:ext cx="0" cy="0"/>
+          <a:chOff x="0" y="0"/>
+          <a:chExt cx="0" cy="0"/>
+        </a:xfrm>
+      </p:grpSpPr>
+      <p:sp>
+        <p:nvSpPr>
+          <p:cNvPr id="4" name="テキスト ボックス 3">
+            <a:extLst>
+              <a:ext uri="{FF2B5EF4-FFF2-40B4-BE49-F238E27FC236}">
+                <a16:creationId xmlns:a16="http://schemas.microsoft.com/office/drawing/2014/main" id="{5A13BF46-B8C5-48AA-8308-C9ECFF431A18}"/>
+              </a:ext>
+            </a:extLst>
+          </p:cNvPr>
+          <p:cNvSpPr txBox="1"/>
+          <p:nvPr/>
+        </p:nvSpPr>
+        <p:spPr>
+          <a:xfrm>
+            <a:off x="567542" y="491954"/>
+            <a:ext cx="5109091" cy="584775"/>
+          </a:xfrm>
+          <a:prstGeom prst="rect">
+            <a:avLst/>
+          </a:prstGeom>
+          <a:noFill/>
+        </p:spPr>
+        <p:txBody>
+          <a:bodyPr wrap="none" rtlCol="0">
+            <a:spAutoFit/>
+          </a:bodyPr>
+          <a:lstStyle/>
+          <a:p>
+            <a:r>
+              <a:rPr lang="ja-JP" altLang="en-US" sz="3200" b="1" u="sng" dirty="0"/>
+              <a:t>シューティングゲーム課題</a:t>
+            </a:r>
+            <a:endParaRPr kumimoji="1" lang="en-US" altLang="ja-JP" sz="3200" b="1" u="sng" dirty="0"/>
+          </a:p>
+        </p:txBody>
+      </p:sp>
+      <p:sp>
+        <p:nvSpPr>
+          <p:cNvPr id="6" name="テキスト ボックス 5">
+            <a:extLst>
+              <a:ext uri="{FF2B5EF4-FFF2-40B4-BE49-F238E27FC236}">
+                <a16:creationId xmlns:a16="http://schemas.microsoft.com/office/drawing/2014/main" id="{55830AD6-028B-4C4E-80BF-B70DFC1C3A46}"/>
+              </a:ext>
+            </a:extLst>
+          </p:cNvPr>
+          <p:cNvSpPr txBox="1"/>
+          <p:nvPr/>
+        </p:nvSpPr>
+        <p:spPr>
+          <a:xfrm>
+            <a:off x="567542" y="1216429"/>
+            <a:ext cx="6032421" cy="3046988"/>
+          </a:xfrm>
+          <a:prstGeom prst="rect">
+            <a:avLst/>
+          </a:prstGeom>
+          <a:noFill/>
+        </p:spPr>
+        <p:txBody>
+          <a:bodyPr wrap="none" rtlCol="0">
+            <a:spAutoFit/>
+          </a:bodyPr>
+          <a:lstStyle/>
+          <a:p>
+            <a:r>
+              <a:rPr lang="ja-JP" altLang="en-US" sz="2400" dirty="0"/>
+              <a:t>あと数日だけちょっとした授業をやります</a:t>
+            </a:r>
+            <a:endParaRPr lang="en-US" altLang="ja-JP" sz="2400" dirty="0"/>
+          </a:p>
+          <a:p>
+            <a:endParaRPr lang="en-US" altLang="ja-JP" sz="2400" dirty="0"/>
+          </a:p>
+          <a:p>
+            <a:r>
+              <a:rPr lang="ja-JP" altLang="en-US" sz="2400" b="1" dirty="0">
+                <a:solidFill>
+                  <a:srgbClr val="FF0000"/>
+                </a:solidFill>
+              </a:rPr>
+              <a:t>■あとやること</a:t>
+            </a:r>
+            <a:endParaRPr lang="en-US" altLang="ja-JP" sz="2400" b="1" dirty="0">
+              <a:solidFill>
+                <a:srgbClr val="FF0000"/>
+              </a:solidFill>
+            </a:endParaRPr>
+          </a:p>
+          <a:p>
+            <a:r>
+              <a:rPr lang="ja-JP" altLang="en-US" sz="2400" dirty="0"/>
+              <a:t>・エフェクト</a:t>
+            </a:r>
+            <a:endParaRPr lang="en-US" altLang="ja-JP" sz="2400" dirty="0"/>
+          </a:p>
+          <a:p>
+            <a:r>
+              <a:rPr lang="ja-JP" altLang="en-US" sz="2400" dirty="0"/>
+              <a:t>・影</a:t>
+            </a:r>
+            <a:endParaRPr lang="en-US" altLang="ja-JP" sz="2400" dirty="0"/>
+          </a:p>
+          <a:p>
+            <a:r>
+              <a:rPr lang="ja-JP" altLang="en-US" sz="2400" dirty="0"/>
+              <a:t>・</a:t>
+            </a:r>
+            <a:r>
+              <a:rPr lang="en-US" altLang="ja-JP" sz="2400" dirty="0"/>
+              <a:t>Z</a:t>
+            </a:r>
+            <a:r>
+              <a:rPr lang="ja-JP" altLang="en-US" sz="2400" dirty="0"/>
+              <a:t>バッファと</a:t>
+            </a:r>
+            <a:r>
+              <a:rPr lang="en-US" altLang="ja-JP" sz="2400" dirty="0"/>
+              <a:t>Z</a:t>
+            </a:r>
+            <a:r>
+              <a:rPr lang="ja-JP" altLang="en-US" sz="2400" dirty="0"/>
+              <a:t>ソート</a:t>
+            </a:r>
+            <a:endParaRPr lang="en-US" altLang="ja-JP" sz="2400" dirty="0"/>
+          </a:p>
+          <a:p>
+            <a:r>
+              <a:rPr lang="ja-JP" altLang="en-US" sz="2400" dirty="0"/>
+              <a:t>・アニメーション</a:t>
+            </a:r>
+            <a:endParaRPr lang="en-US" altLang="ja-JP" sz="2400" dirty="0"/>
+          </a:p>
+          <a:p>
+            <a:r>
+              <a:rPr lang="ja-JP" altLang="en-US" sz="2400" dirty="0"/>
+              <a:t>・</a:t>
+            </a:r>
+            <a:r>
+              <a:rPr lang="en-US" altLang="ja-JP" sz="2400" dirty="0"/>
+              <a:t>Blender</a:t>
+            </a:r>
+          </a:p>
+        </p:txBody>
+      </p:sp>
+    </p:spTree>
+    <p:extLst>
+      <p:ext uri="{BB962C8B-B14F-4D97-AF65-F5344CB8AC3E}">
+        <p14:creationId xmlns:p14="http://schemas.microsoft.com/office/powerpoint/2010/main" val="1318386550"/>
+      </p:ext>
+    </p:extLst>
+  </p:cSld>
+  <p:clrMapOvr>
+    <a:masterClrMapping/>
+  </p:clrMapOvr>
+</p:sld>
+</file>
+
 <file path=ppt/theme/theme1.xml><?xml version="1.0" encoding="utf-8"?>
 <a:theme xmlns:a="http://schemas.openxmlformats.org/drawingml/2006/main" name="Office テーマ">
   <a:themeElements>
